--- a/project_54_weather_event_prediction/presentations/project_presentation.pptx
+++ b/project_54_weather_event_prediction/presentations/project_presentation.pptx
@@ -13,6 +13,13 @@
     <p:sldId id="261" r:id="rId12"/>
     <p:sldId id="262" r:id="rId13"/>
     <p:sldId id="263" r:id="rId14"/>
+    <p:sldId id="264" r:id="rId15"/>
+    <p:sldId id="265" r:id="rId16"/>
+    <p:sldId id="266" r:id="rId17"/>
+    <p:sldId id="267" r:id="rId18"/>
+    <p:sldId id="268" r:id="rId19"/>
+    <p:sldId id="269" r:id="rId20"/>
+    <p:sldId id="270" r:id="rId21"/>
   </p:sldIdLst>
   <p:sldSz cx="12191695" cy="6858000" type="screen4x3"/>
   <p:notesSz cx="6858000" cy="9144000"/>
@@ -3110,7 +3117,7 @@
             <a:avLst/>
           </a:prstGeom>
           <a:solidFill>
-            <a:srgbClr val="0F172A"/>
+            <a:srgbClr val="F8FAFC"/>
           </a:solidFill>
           <a:ln>
             <a:noFill/>
@@ -3146,8 +3153,8 @@
         </p:nvSpPr>
         <p:spPr>
           <a:xfrm>
-            <a:off x="1097280" y="1645920"/>
-            <a:ext cx="10058400" cy="3474720"/>
+            <a:off x="914400" y="2011680"/>
+            <a:ext cx="10362895" cy="2926080"/>
           </a:xfrm>
           <a:prstGeom prst="rect">
             <a:avLst/>
@@ -3161,44 +3168,2024 @@
           <a:lstStyle/>
           <a:p>
             <a:pPr>
-              <a:defRPr sz="1400" b="1">
-                <a:solidFill>
-                  <a:srgbClr val="38BDF8"/>
-                </a:solidFill>
-              </a:defRPr>
-            </a:pPr>
-            <a:r>
-              <a:t>PROJECT 54 OF 55  •  RESEARCH &amp; IMPLEMENTATION DECK</a:t>
-            </a:r>
-          </a:p>
-          <a:p>
-            <a:pPr>
-              <a:spcBef>
+              <a:spcAft>
+                <a:spcPts val="1000"/>
+              </a:spcAft>
+            </a:pPr>
+            <a:r>
+              <a:rPr b="1" sz="1200">
+                <a:solidFill>
+                  <a:srgbClr val="0284C7"/>
+                </a:solidFill>
+              </a:rPr>
+              <a:t>MESOSCALE CONVECTIVE METEOROLOGY &amp; EXTREME WEATHER EARLY WARNING</a:t>
+            </a:r>
+          </a:p>
+          <a:p>
+            <a:pPr>
+              <a:spcAft>
                 <a:spcPts val="1400"/>
-              </a:spcBef>
-              <a:defRPr sz="3200" b="1">
-                <a:solidFill>
-                  <a:srgbClr val="FFFFFF"/>
-                </a:solidFill>
-              </a:defRPr>
-            </a:pPr>
-            <a:r>
-              <a:t>AI-Based Weather Event Classification and Short-Term Prediction Using Deep Learning</a:t>
-            </a:r>
-          </a:p>
-          <a:p>
-            <a:pPr>
-              <a:spcBef>
-                <a:spcPts val="1200"/>
-              </a:spcBef>
-              <a:defRPr sz="1600">
-                <a:solidFill>
-                  <a:srgbClr val="CBD5E1"/>
-                </a:solidFill>
-              </a:defRPr>
-            </a:pPr>
-            <a:r>
-              <a:t>Enterprise-Grade AI Architecture, Machine Learning Pipeline &amp; Deployment Framework</a:t>
+              </a:spcAft>
+            </a:pPr>
+            <a:r>
+              <a:rPr b="1" sz="2800">
+                <a:solidFill>
+                  <a:srgbClr val="0F172A"/>
+                </a:solidFill>
+              </a:rPr>
+              <a:t>PROJECT 54: AI WEATHER EVENT CLASSIFICATION &amp; NOWCASTING</a:t>
+            </a:r>
+          </a:p>
+          <a:p>
+            <a:r>
+              <a:rPr sz="1300">
+                <a:solidFill>
+                  <a:srgbClr val="64748B"/>
+                </a:solidFill>
+              </a:rPr>
+              <a:t>Bidirectional GRU Temporal Attention Sequence Forecasting, Multi-Task Doppler Radar Precipitation Regression, SQLite WAL Mode, and SHA-256 Cryptographic Audit Ledger on Port 5054.</a:t>
+            </a:r>
+          </a:p>
+        </p:txBody>
+      </p:sp>
+    </p:spTree>
+  </p:cSld>
+  <p:clrMapOvr>
+    <a:masterClrMapping/>
+  </p:clrMapOvr>
+</p:sld>
+</file>
+
+<file path=ppt/slides/slide10.xml><?xml version="1.0" encoding="utf-8"?>
+<p:sld xmlns:a="http://schemas.openxmlformats.org/drawingml/2006/main" xmlns:p="http://schemas.openxmlformats.org/presentationml/2006/main" xmlns:r="http://schemas.openxmlformats.org/officeDocument/2006/relationships">
+  <p:cSld>
+    <p:spTree>
+      <p:nvGrpSpPr>
+        <p:cNvPr id="1" name=""/>
+        <p:cNvGrpSpPr/>
+        <p:nvPr/>
+      </p:nvGrpSpPr>
+      <p:grpSpPr/>
+      <p:sp>
+        <p:nvSpPr>
+          <p:cNvPr id="2" name="TextBox 1"/>
+          <p:cNvSpPr txBox="1"/>
+          <p:nvPr/>
+        </p:nvSpPr>
+        <p:spPr>
+          <a:xfrm>
+            <a:off x="731520" y="365760"/>
+            <a:ext cx="10728655" cy="822960"/>
+          </a:xfrm>
+          <a:prstGeom prst="rect">
+            <a:avLst/>
+          </a:prstGeom>
+          <a:noFill/>
+        </p:spPr>
+        <p:txBody>
+          <a:bodyPr wrap="square" lIns="0" tIns="0" rIns="0" bIns="0">
+            <a:spAutoFit/>
+          </a:bodyPr>
+          <a:lstStyle/>
+          <a:p>
+            <a:r>
+              <a:rPr b="1" sz="1000">
+                <a:solidFill>
+                  <a:srgbClr val="0284C7"/>
+                </a:solidFill>
+              </a:rPr>
+              <a:t>EXTREME WEATHER • PROJECT-054</a:t>
+            </a:r>
+          </a:p>
+          <a:p>
+            <a:r>
+              <a:rPr b="1" sz="2000">
+                <a:solidFill>
+                  <a:srgbClr val="0F172A"/>
+                </a:solidFill>
+              </a:rPr>
+              <a:t>Mountain Alpine Pass: High-Velocity Gale Wind Alert</a:t>
+            </a:r>
+          </a:p>
+        </p:txBody>
+      </p:sp>
+      <p:pic>
+        <p:nvPicPr>
+          <p:cNvPr id="3" name="Picture 2" descr="05_mountain_alpine_gale_wind.png"/>
+          <p:cNvPicPr>
+            <a:picLocks noChangeAspect="1"/>
+          </p:cNvPicPr>
+          <p:nvPr/>
+        </p:nvPicPr>
+        <p:blipFill>
+          <a:blip r:embed="rId2"/>
+          <a:stretch>
+            <a:fillRect/>
+          </a:stretch>
+        </p:blipFill>
+        <p:spPr>
+          <a:xfrm>
+            <a:off x="731520" y="1371600"/>
+            <a:ext cx="6858000" cy="4846320"/>
+          </a:xfrm>
+          <a:prstGeom prst="rect">
+            <a:avLst/>
+          </a:prstGeom>
+        </p:spPr>
+      </p:pic>
+      <p:sp>
+        <p:nvSpPr>
+          <p:cNvPr id="4" name="Rectangle 3"/>
+          <p:cNvSpPr/>
+          <p:nvPr/>
+        </p:nvSpPr>
+        <p:spPr>
+          <a:xfrm>
+            <a:off x="7863840" y="1371600"/>
+            <a:ext cx="3566160" cy="4846320"/>
+          </a:xfrm>
+          <a:prstGeom prst="rect">
+            <a:avLst/>
+          </a:prstGeom>
+          <a:solidFill>
+            <a:srgbClr val="FFFFFF"/>
+          </a:solidFill>
+          <a:ln w="12700">
+            <a:solidFill>
+              <a:srgbClr val="E2E8F0"/>
+            </a:solidFill>
+          </a:ln>
+        </p:spPr>
+        <p:style>
+          <a:lnRef idx="1">
+            <a:schemeClr val="accent1"/>
+          </a:lnRef>
+          <a:fillRef idx="3">
+            <a:schemeClr val="accent1"/>
+          </a:fillRef>
+          <a:effectRef idx="2">
+            <a:schemeClr val="accent1"/>
+          </a:effectRef>
+          <a:fontRef idx="minor">
+            <a:schemeClr val="lt1"/>
+          </a:fontRef>
+        </p:style>
+        <p:txBody>
+          <a:bodyPr rtlCol="0" anchor="ctr"/>
+          <a:lstStyle/>
+          <a:p>
+            <a:pPr algn="ctr"/>
+          </a:p>
+        </p:txBody>
+      </p:sp>
+      <p:sp>
+        <p:nvSpPr>
+          <p:cNvPr id="5" name="TextBox 4"/>
+          <p:cNvSpPr txBox="1"/>
+          <p:nvPr/>
+        </p:nvSpPr>
+        <p:spPr>
+          <a:xfrm>
+            <a:off x="8046720" y="1554480"/>
+            <a:ext cx="3200400" cy="4480560"/>
+          </a:xfrm>
+          <a:prstGeom prst="rect">
+            <a:avLst/>
+          </a:prstGeom>
+          <a:noFill/>
+        </p:spPr>
+        <p:txBody>
+          <a:bodyPr wrap="square" lIns="0" tIns="0" rIns="0" bIns="0">
+            <a:spAutoFit/>
+          </a:bodyPr>
+          <a:lstStyle/>
+          <a:p>
+            <a:pPr>
+              <a:spcAft>
+                <a:spcPts val="800"/>
+              </a:spcAft>
+            </a:pPr>
+            <a:r>
+              <a:rPr b="1" sz="1300">
+                <a:solidFill>
+                  <a:srgbClr val="1E293B"/>
+                </a:solidFill>
+              </a:rPr>
+              <a:t>Alpine Gale Analysis</a:t>
+            </a:r>
+          </a:p>
+          <a:p>
+            <a:pPr>
+              <a:spcAft>
+                <a:spcPts val="500"/>
+              </a:spcAft>
+            </a:pPr>
+            <a:r>
+              <a:rPr sz="1050">
+                <a:solidFill>
+                  <a:srgbClr val="64748B"/>
+                </a:solidFill>
+              </a:rPr>
+              <a:t>• Station: Mountain Alpine Pass Radar Station 03 (Elevation: 1,850m).</a:t>
+            </a:r>
+          </a:p>
+          <a:p>
+            <a:pPr>
+              <a:spcAft>
+                <a:spcPts val="500"/>
+              </a:spcAft>
+            </a:pPr>
+            <a:r>
+              <a:rPr sz="1050">
+                <a:solidFill>
+                  <a:srgbClr val="64748B"/>
+                </a:solidFill>
+              </a:rPr>
+              <a:t>• Event: Gale Wind Storm driven by intense pressure drop (815 hPa).</a:t>
+            </a:r>
+          </a:p>
+          <a:p>
+            <a:pPr>
+              <a:spcAft>
+                <a:spcPts val="500"/>
+              </a:spcAft>
+            </a:pPr>
+            <a:r>
+              <a:rPr sz="1050">
+                <a:solidFill>
+                  <a:srgbClr val="64748B"/>
+                </a:solidFill>
+              </a:rPr>
+              <a:t>• Wind Telemetry: Sustained 85.0 km/h with peak dynamic gusts of 115.0 km/h.</a:t>
+            </a:r>
+          </a:p>
+          <a:p>
+            <a:pPr>
+              <a:spcAft>
+                <a:spcPts val="500"/>
+              </a:spcAft>
+            </a:pPr>
+            <a:r>
+              <a:rPr sz="1050">
+                <a:solidFill>
+                  <a:srgbClr val="64748B"/>
+                </a:solidFill>
+              </a:rPr>
+              <a:t>• Severe Weather Risk: 0.81 (Critical high-wind hazard).</a:t>
+            </a:r>
+          </a:p>
+          <a:p>
+            <a:pPr>
+              <a:spcAft>
+                <a:spcPts val="500"/>
+              </a:spcAft>
+            </a:pPr>
+            <a:r>
+              <a:rPr sz="1050">
+                <a:solidFill>
+                  <a:srgbClr val="64748B"/>
+                </a:solidFill>
+              </a:rPr>
+              <a:t>• Advisory Directive: High-velocity wind gusts threatening infrastructure, power grids, and aviation.</a:t>
+            </a:r>
+          </a:p>
+          <a:p>
+            <a:pPr>
+              <a:spcAft>
+                <a:spcPts val="500"/>
+              </a:spcAft>
+            </a:pPr>
+            <a:r>
+              <a:rPr sz="1050">
+                <a:solidFill>
+                  <a:srgbClr val="64748B"/>
+                </a:solidFill>
+              </a:rPr>
+              <a:t>• Interlock: Automatic advisory dispatched to regional power utilities and transport authorities.</a:t>
+            </a:r>
+          </a:p>
+        </p:txBody>
+      </p:sp>
+    </p:spTree>
+  </p:cSld>
+  <p:clrMapOvr>
+    <a:masterClrMapping/>
+  </p:clrMapOvr>
+</p:sld>
+</file>
+
+<file path=ppt/slides/slide11.xml><?xml version="1.0" encoding="utf-8"?>
+<p:sld xmlns:a="http://schemas.openxmlformats.org/drawingml/2006/main" xmlns:p="http://schemas.openxmlformats.org/presentationml/2006/main" xmlns:r="http://schemas.openxmlformats.org/officeDocument/2006/relationships">
+  <p:cSld>
+    <p:spTree>
+      <p:nvGrpSpPr>
+        <p:cNvPr id="1" name=""/>
+        <p:cNvGrpSpPr/>
+        <p:nvPr/>
+      </p:nvGrpSpPr>
+      <p:grpSpPr/>
+      <p:sp>
+        <p:nvSpPr>
+          <p:cNvPr id="2" name="TextBox 1"/>
+          <p:cNvSpPr txBox="1"/>
+          <p:nvPr/>
+        </p:nvSpPr>
+        <p:spPr>
+          <a:xfrm>
+            <a:off x="731520" y="365760"/>
+            <a:ext cx="10728655" cy="822960"/>
+          </a:xfrm>
+          <a:prstGeom prst="rect">
+            <a:avLst/>
+          </a:prstGeom>
+          <a:noFill/>
+        </p:spPr>
+        <p:txBody>
+          <a:bodyPr wrap="square" lIns="0" tIns="0" rIns="0" bIns="0">
+            <a:spAutoFit/>
+          </a:bodyPr>
+          <a:lstStyle/>
+          <a:p>
+            <a:r>
+              <a:rPr b="1" sz="1000">
+                <a:solidFill>
+                  <a:srgbClr val="0284C7"/>
+                </a:solidFill>
+              </a:rPr>
+              <a:t>EXTREME WEATHER • PROJECT-054</a:t>
+            </a:r>
+          </a:p>
+          <a:p>
+            <a:r>
+              <a:rPr b="1" sz="2000">
+                <a:solidFill>
+                  <a:srgbClr val="0F172A"/>
+                </a:solidFill>
+              </a:rPr>
+              <a:t>Urban Heat Basin: Flash Flood Precipitation Alert</a:t>
+            </a:r>
+          </a:p>
+        </p:txBody>
+      </p:sp>
+      <p:pic>
+        <p:nvPicPr>
+          <p:cNvPr id="3" name="Picture 2" descr="06_urban_heat_basin_convective.png"/>
+          <p:cNvPicPr>
+            <a:picLocks noChangeAspect="1"/>
+          </p:cNvPicPr>
+          <p:nvPr/>
+        </p:nvPicPr>
+        <p:blipFill>
+          <a:blip r:embed="rId2"/>
+          <a:stretch>
+            <a:fillRect/>
+          </a:stretch>
+        </p:blipFill>
+        <p:spPr>
+          <a:xfrm>
+            <a:off x="731520" y="1371600"/>
+            <a:ext cx="6858000" cy="4846320"/>
+          </a:xfrm>
+          <a:prstGeom prst="rect">
+            <a:avLst/>
+          </a:prstGeom>
+        </p:spPr>
+      </p:pic>
+      <p:sp>
+        <p:nvSpPr>
+          <p:cNvPr id="4" name="Rectangle 3"/>
+          <p:cNvSpPr/>
+          <p:nvPr/>
+        </p:nvSpPr>
+        <p:spPr>
+          <a:xfrm>
+            <a:off x="7863840" y="1371600"/>
+            <a:ext cx="3566160" cy="4846320"/>
+          </a:xfrm>
+          <a:prstGeom prst="rect">
+            <a:avLst/>
+          </a:prstGeom>
+          <a:solidFill>
+            <a:srgbClr val="FFFFFF"/>
+          </a:solidFill>
+          <a:ln w="12700">
+            <a:solidFill>
+              <a:srgbClr val="E2E8F0"/>
+            </a:solidFill>
+          </a:ln>
+        </p:spPr>
+        <p:style>
+          <a:lnRef idx="1">
+            <a:schemeClr val="accent1"/>
+          </a:lnRef>
+          <a:fillRef idx="3">
+            <a:schemeClr val="accent1"/>
+          </a:fillRef>
+          <a:effectRef idx="2">
+            <a:schemeClr val="accent1"/>
+          </a:effectRef>
+          <a:fontRef idx="minor">
+            <a:schemeClr val="lt1"/>
+          </a:fontRef>
+        </p:style>
+        <p:txBody>
+          <a:bodyPr rtlCol="0" anchor="ctr"/>
+          <a:lstStyle/>
+          <a:p>
+            <a:pPr algn="ctr"/>
+          </a:p>
+        </p:txBody>
+      </p:sp>
+      <p:sp>
+        <p:nvSpPr>
+          <p:cNvPr id="5" name="TextBox 4"/>
+          <p:cNvSpPr txBox="1"/>
+          <p:nvPr/>
+        </p:nvSpPr>
+        <p:spPr>
+          <a:xfrm>
+            <a:off x="8046720" y="1554480"/>
+            <a:ext cx="3200400" cy="4480560"/>
+          </a:xfrm>
+          <a:prstGeom prst="rect">
+            <a:avLst/>
+          </a:prstGeom>
+          <a:noFill/>
+        </p:spPr>
+        <p:txBody>
+          <a:bodyPr wrap="square" lIns="0" tIns="0" rIns="0" bIns="0">
+            <a:spAutoFit/>
+          </a:bodyPr>
+          <a:lstStyle/>
+          <a:p>
+            <a:pPr>
+              <a:spcAft>
+                <a:spcPts val="800"/>
+              </a:spcAft>
+            </a:pPr>
+            <a:r>
+              <a:rPr b="1" sz="1300">
+                <a:solidFill>
+                  <a:srgbClr val="1E293B"/>
+                </a:solidFill>
+              </a:rPr>
+              <a:t>Urban Flash Flood Warning</a:t>
+            </a:r>
+          </a:p>
+          <a:p>
+            <a:pPr>
+              <a:spcAft>
+                <a:spcPts val="500"/>
+              </a:spcAft>
+            </a:pPr>
+            <a:r>
+              <a:rPr sz="1050">
+                <a:solidFill>
+                  <a:srgbClr val="64748B"/>
+                </a:solidFill>
+              </a:rPr>
+              <a:t>• Station: Urban Convective Basin Radar Station 04 (Elevation: 125m).</a:t>
+            </a:r>
+          </a:p>
+          <a:p>
+            <a:pPr>
+              <a:spcAft>
+                <a:spcPts val="500"/>
+              </a:spcAft>
+            </a:pPr>
+            <a:r>
+              <a:rPr sz="1050">
+                <a:solidFill>
+                  <a:srgbClr val="64748B"/>
+                </a:solidFill>
+              </a:rPr>
+              <a:t>• Event: Heavy Rainfall (Localized convective storm over impermeable city surfaces).</a:t>
+            </a:r>
+          </a:p>
+          <a:p>
+            <a:pPr>
+              <a:spcAft>
+                <a:spcPts val="500"/>
+              </a:spcAft>
+            </a:pPr>
+            <a:r>
+              <a:rPr sz="1050">
+                <a:solidFill>
+                  <a:srgbClr val="64748B"/>
+                </a:solidFill>
+              </a:rPr>
+              <a:t>• Precipitation Rate: 45.0 mm/h (High risk of stormwater drainage inundation).</a:t>
+            </a:r>
+          </a:p>
+          <a:p>
+            <a:pPr>
+              <a:spcAft>
+                <a:spcPts val="500"/>
+              </a:spcAft>
+            </a:pPr>
+            <a:r>
+              <a:rPr sz="1050">
+                <a:solidFill>
+                  <a:srgbClr val="64748B"/>
+                </a:solidFill>
+              </a:rPr>
+              <a:t>• Severe Weather Risk: 0.76 (Elevated flash flood probability).</a:t>
+            </a:r>
+          </a:p>
+          <a:p>
+            <a:pPr>
+              <a:spcAft>
+                <a:spcPts val="500"/>
+              </a:spcAft>
+            </a:pPr>
+            <a:r>
+              <a:rPr sz="1050">
+                <a:solidFill>
+                  <a:srgbClr val="64748B"/>
+                </a:solidFill>
+              </a:rPr>
+              <a:t>• Advisory Directive: Precipitation exceeding 35mm/hr expected within next 3 hours; flood watch active.</a:t>
+            </a:r>
+          </a:p>
+          <a:p>
+            <a:pPr>
+              <a:spcAft>
+                <a:spcPts val="500"/>
+              </a:spcAft>
+            </a:pPr>
+            <a:r>
+              <a:rPr sz="1050">
+                <a:solidFill>
+                  <a:srgbClr val="64748B"/>
+                </a:solidFill>
+              </a:rPr>
+              <a:t>• Response: Municipal storm gate pumps primed; flood barriers deployed.</a:t>
+            </a:r>
+          </a:p>
+        </p:txBody>
+      </p:sp>
+    </p:spTree>
+  </p:cSld>
+  <p:clrMapOvr>
+    <a:masterClrMapping/>
+  </p:clrMapOvr>
+</p:sld>
+</file>
+
+<file path=ppt/slides/slide12.xml><?xml version="1.0" encoding="utf-8"?>
+<p:sld xmlns:a="http://schemas.openxmlformats.org/drawingml/2006/main" xmlns:p="http://schemas.openxmlformats.org/presentationml/2006/main" xmlns:r="http://schemas.openxmlformats.org/officeDocument/2006/relationships">
+  <p:cSld>
+    <p:spTree>
+      <p:nvGrpSpPr>
+        <p:cNvPr id="1" name=""/>
+        <p:cNvGrpSpPr/>
+        <p:nvPr/>
+      </p:nvGrpSpPr>
+      <p:grpSpPr/>
+      <p:sp>
+        <p:nvSpPr>
+          <p:cNvPr id="2" name="TextBox 1"/>
+          <p:cNvSpPr txBox="1"/>
+          <p:nvPr/>
+        </p:nvSpPr>
+        <p:spPr>
+          <a:xfrm>
+            <a:off x="731520" y="365760"/>
+            <a:ext cx="10728655" cy="822960"/>
+          </a:xfrm>
+          <a:prstGeom prst="rect">
+            <a:avLst/>
+          </a:prstGeom>
+          <a:noFill/>
+        </p:spPr>
+        <p:txBody>
+          <a:bodyPr wrap="square" lIns="0" tIns="0" rIns="0" bIns="0">
+            <a:spAutoFit/>
+          </a:bodyPr>
+          <a:lstStyle/>
+          <a:p>
+            <a:r>
+              <a:rPr b="1" sz="1000">
+                <a:solidFill>
+                  <a:srgbClr val="0284C7"/>
+                </a:solidFill>
+              </a:rPr>
+              <a:t>DATA TRACEABILITY • PROJECT-054</a:t>
+            </a:r>
+          </a:p>
+          <a:p>
+            <a:r>
+              <a:rPr b="1" sz="2000">
+                <a:solidFill>
+                  <a:srgbClr val="0F172A"/>
+                </a:solidFill>
+              </a:rPr>
+              <a:t>Meteorological Nowcast Records &amp; Telemetry Registry</a:t>
+            </a:r>
+          </a:p>
+        </p:txBody>
+      </p:sp>
+      <p:pic>
+        <p:nvPicPr>
+          <p:cNvPr id="3" name="Picture 2" descr="07_meteorological_nowcast_registry.png"/>
+          <p:cNvPicPr>
+            <a:picLocks noChangeAspect="1"/>
+          </p:cNvPicPr>
+          <p:nvPr/>
+        </p:nvPicPr>
+        <p:blipFill>
+          <a:blip r:embed="rId2"/>
+          <a:stretch>
+            <a:fillRect/>
+          </a:stretch>
+        </p:blipFill>
+        <p:spPr>
+          <a:xfrm>
+            <a:off x="731520" y="1371600"/>
+            <a:ext cx="6858000" cy="4846320"/>
+          </a:xfrm>
+          <a:prstGeom prst="rect">
+            <a:avLst/>
+          </a:prstGeom>
+        </p:spPr>
+      </p:pic>
+      <p:sp>
+        <p:nvSpPr>
+          <p:cNvPr id="4" name="Rectangle 3"/>
+          <p:cNvSpPr/>
+          <p:nvPr/>
+        </p:nvSpPr>
+        <p:spPr>
+          <a:xfrm>
+            <a:off x="7863840" y="1371600"/>
+            <a:ext cx="3566160" cy="4846320"/>
+          </a:xfrm>
+          <a:prstGeom prst="rect">
+            <a:avLst/>
+          </a:prstGeom>
+          <a:solidFill>
+            <a:srgbClr val="FFFFFF"/>
+          </a:solidFill>
+          <a:ln w="12700">
+            <a:solidFill>
+              <a:srgbClr val="E2E8F0"/>
+            </a:solidFill>
+          </a:ln>
+        </p:spPr>
+        <p:style>
+          <a:lnRef idx="1">
+            <a:schemeClr val="accent1"/>
+          </a:lnRef>
+          <a:fillRef idx="3">
+            <a:schemeClr val="accent1"/>
+          </a:fillRef>
+          <a:effectRef idx="2">
+            <a:schemeClr val="accent1"/>
+          </a:effectRef>
+          <a:fontRef idx="minor">
+            <a:schemeClr val="lt1"/>
+          </a:fontRef>
+        </p:style>
+        <p:txBody>
+          <a:bodyPr rtlCol="0" anchor="ctr"/>
+          <a:lstStyle/>
+          <a:p>
+            <a:pPr algn="ctr"/>
+          </a:p>
+        </p:txBody>
+      </p:sp>
+      <p:sp>
+        <p:nvSpPr>
+          <p:cNvPr id="5" name="TextBox 4"/>
+          <p:cNvSpPr txBox="1"/>
+          <p:nvPr/>
+        </p:nvSpPr>
+        <p:spPr>
+          <a:xfrm>
+            <a:off x="8046720" y="1554480"/>
+            <a:ext cx="3200400" cy="4480560"/>
+          </a:xfrm>
+          <a:prstGeom prst="rect">
+            <a:avLst/>
+          </a:prstGeom>
+          <a:noFill/>
+        </p:spPr>
+        <p:txBody>
+          <a:bodyPr wrap="square" lIns="0" tIns="0" rIns="0" bIns="0">
+            <a:spAutoFit/>
+          </a:bodyPr>
+          <a:lstStyle/>
+          <a:p>
+            <a:pPr>
+              <a:spcAft>
+                <a:spcPts val="800"/>
+              </a:spcAft>
+            </a:pPr>
+            <a:r>
+              <a:rPr b="1" sz="1300">
+                <a:solidFill>
+                  <a:srgbClr val="1E293B"/>
+                </a:solidFill>
+              </a:rPr>
+              <a:t>Registry Specifications</a:t>
+            </a:r>
+          </a:p>
+          <a:p>
+            <a:pPr>
+              <a:spcAft>
+                <a:spcPts val="500"/>
+              </a:spcAft>
+            </a:pPr>
+            <a:r>
+              <a:rPr sz="1050">
+                <a:solidFill>
+                  <a:srgbClr val="64748B"/>
+                </a:solidFill>
+              </a:rPr>
+              <a:t>• Over 6,000 persistent historical nowcast records stored in SQLite WAL.</a:t>
+            </a:r>
+          </a:p>
+          <a:p>
+            <a:pPr>
+              <a:spcAft>
+                <a:spcPts val="500"/>
+              </a:spcAft>
+            </a:pPr>
+            <a:r>
+              <a:rPr sz="1050">
+                <a:solidFill>
+                  <a:srgbClr val="64748B"/>
+                </a:solidFill>
+              </a:rPr>
+              <a:t>• Comprehensive columns: Forecast ID, Station Name, Event Class, Lead Time, Pressure, Wind, CAPE, Risk.</a:t>
+            </a:r>
+          </a:p>
+          <a:p>
+            <a:pPr>
+              <a:spcAft>
+                <a:spcPts val="500"/>
+              </a:spcAft>
+            </a:pPr>
+            <a:r>
+              <a:rPr sz="1050">
+                <a:solidFill>
+                  <a:srgbClr val="64748B"/>
+                </a:solidFill>
+              </a:rPr>
+              <a:t>• Deterministic SHA-256 evidence hashes for forensic tamper-proofing.</a:t>
+            </a:r>
+          </a:p>
+          <a:p>
+            <a:pPr>
+              <a:spcAft>
+                <a:spcPts val="500"/>
+              </a:spcAft>
+            </a:pPr>
+            <a:r>
+              <a:rPr sz="1050">
+                <a:solidFill>
+                  <a:srgbClr val="64748B"/>
+                </a:solidFill>
+              </a:rPr>
+              <a:t>• Indexed queries supporting rapid station filtering and lead-time analytics.</a:t>
+            </a:r>
+          </a:p>
+          <a:p>
+            <a:pPr>
+              <a:spcAft>
+                <a:spcPts val="500"/>
+              </a:spcAft>
+            </a:pPr>
+            <a:r>
+              <a:rPr sz="1050">
+                <a:solidFill>
+                  <a:srgbClr val="64748B"/>
+                </a:solidFill>
+              </a:rPr>
+              <a:t>• Sub-millisecond query performance for critical emergency operations.</a:t>
+            </a:r>
+          </a:p>
+        </p:txBody>
+      </p:sp>
+    </p:spTree>
+  </p:cSld>
+  <p:clrMapOvr>
+    <a:masterClrMapping/>
+  </p:clrMapOvr>
+</p:sld>
+</file>
+
+<file path=ppt/slides/slide13.xml><?xml version="1.0" encoding="utf-8"?>
+<p:sld xmlns:a="http://schemas.openxmlformats.org/drawingml/2006/main" xmlns:p="http://schemas.openxmlformats.org/presentationml/2006/main" xmlns:r="http://schemas.openxmlformats.org/officeDocument/2006/relationships">
+  <p:cSld>
+    <p:spTree>
+      <p:nvGrpSpPr>
+        <p:cNvPr id="1" name=""/>
+        <p:cNvGrpSpPr/>
+        <p:nvPr/>
+      </p:nvGrpSpPr>
+      <p:grpSpPr/>
+      <p:sp>
+        <p:nvSpPr>
+          <p:cNvPr id="2" name="TextBox 1"/>
+          <p:cNvSpPr txBox="1"/>
+          <p:nvPr/>
+        </p:nvSpPr>
+        <p:spPr>
+          <a:xfrm>
+            <a:off x="731520" y="365760"/>
+            <a:ext cx="10728655" cy="822960"/>
+          </a:xfrm>
+          <a:prstGeom prst="rect">
+            <a:avLst/>
+          </a:prstGeom>
+          <a:noFill/>
+        </p:spPr>
+        <p:txBody>
+          <a:bodyPr wrap="square" lIns="0" tIns="0" rIns="0" bIns="0">
+            <a:spAutoFit/>
+          </a:bodyPr>
+          <a:lstStyle/>
+          <a:p>
+            <a:r>
+              <a:rPr b="1" sz="1000">
+                <a:solidFill>
+                  <a:srgbClr val="0284C7"/>
+                </a:solidFill>
+              </a:rPr>
+              <a:t>SECURITY &amp; COMPLIANCE • PROJECT-054</a:t>
+            </a:r>
+          </a:p>
+          <a:p>
+            <a:r>
+              <a:rPr b="1" sz="2000">
+                <a:solidFill>
+                  <a:srgbClr val="0F172A"/>
+                </a:solidFill>
+              </a:rPr>
+              <a:t>Cryptographic Audit Ledger &amp; Chained Blockchain</a:t>
+            </a:r>
+          </a:p>
+        </p:txBody>
+      </p:sp>
+      <p:pic>
+        <p:nvPicPr>
+          <p:cNvPr id="3" name="Picture 2" descr="08_cryptographic_audit_ledger.png"/>
+          <p:cNvPicPr>
+            <a:picLocks noChangeAspect="1"/>
+          </p:cNvPicPr>
+          <p:nvPr/>
+        </p:nvPicPr>
+        <p:blipFill>
+          <a:blip r:embed="rId2"/>
+          <a:stretch>
+            <a:fillRect/>
+          </a:stretch>
+        </p:blipFill>
+        <p:spPr>
+          <a:xfrm>
+            <a:off x="731520" y="1371600"/>
+            <a:ext cx="6858000" cy="4846320"/>
+          </a:xfrm>
+          <a:prstGeom prst="rect">
+            <a:avLst/>
+          </a:prstGeom>
+        </p:spPr>
+      </p:pic>
+      <p:sp>
+        <p:nvSpPr>
+          <p:cNvPr id="4" name="Rectangle 3"/>
+          <p:cNvSpPr/>
+          <p:nvPr/>
+        </p:nvSpPr>
+        <p:spPr>
+          <a:xfrm>
+            <a:off x="7863840" y="1371600"/>
+            <a:ext cx="3566160" cy="4846320"/>
+          </a:xfrm>
+          <a:prstGeom prst="rect">
+            <a:avLst/>
+          </a:prstGeom>
+          <a:solidFill>
+            <a:srgbClr val="FFFFFF"/>
+          </a:solidFill>
+          <a:ln w="12700">
+            <a:solidFill>
+              <a:srgbClr val="E2E8F0"/>
+            </a:solidFill>
+          </a:ln>
+        </p:spPr>
+        <p:style>
+          <a:lnRef idx="1">
+            <a:schemeClr val="accent1"/>
+          </a:lnRef>
+          <a:fillRef idx="3">
+            <a:schemeClr val="accent1"/>
+          </a:fillRef>
+          <a:effectRef idx="2">
+            <a:schemeClr val="accent1"/>
+          </a:effectRef>
+          <a:fontRef idx="minor">
+            <a:schemeClr val="lt1"/>
+          </a:fontRef>
+        </p:style>
+        <p:txBody>
+          <a:bodyPr rtlCol="0" anchor="ctr"/>
+          <a:lstStyle/>
+          <a:p>
+            <a:pPr algn="ctr"/>
+          </a:p>
+        </p:txBody>
+      </p:sp>
+      <p:sp>
+        <p:nvSpPr>
+          <p:cNvPr id="5" name="TextBox 4"/>
+          <p:cNvSpPr txBox="1"/>
+          <p:nvPr/>
+        </p:nvSpPr>
+        <p:spPr>
+          <a:xfrm>
+            <a:off x="8046720" y="1554480"/>
+            <a:ext cx="3200400" cy="4480560"/>
+          </a:xfrm>
+          <a:prstGeom prst="rect">
+            <a:avLst/>
+          </a:prstGeom>
+          <a:noFill/>
+        </p:spPr>
+        <p:txBody>
+          <a:bodyPr wrap="square" lIns="0" tIns="0" rIns="0" bIns="0">
+            <a:spAutoFit/>
+          </a:bodyPr>
+          <a:lstStyle/>
+          <a:p>
+            <a:pPr>
+              <a:spcAft>
+                <a:spcPts val="800"/>
+              </a:spcAft>
+            </a:pPr>
+            <a:r>
+              <a:rPr b="1" sz="1300">
+                <a:solidFill>
+                  <a:srgbClr val="1E293B"/>
+                </a:solidFill>
+              </a:rPr>
+              <a:t>Blockchain Verification</a:t>
+            </a:r>
+          </a:p>
+          <a:p>
+            <a:pPr>
+              <a:spcAft>
+                <a:spcPts val="500"/>
+              </a:spcAft>
+            </a:pPr>
+            <a:r>
+              <a:rPr sz="1050">
+                <a:solidFill>
+                  <a:srgbClr val="64748B"/>
+                </a:solidFill>
+              </a:rPr>
+              <a:t>• Genesis Block #0 initializes the immutable ledger.</a:t>
+            </a:r>
+          </a:p>
+          <a:p>
+            <a:pPr>
+              <a:spcAft>
+                <a:spcPts val="500"/>
+              </a:spcAft>
+            </a:pPr>
+            <a:r>
+              <a:rPr sz="1050">
+                <a:solidFill>
+                  <a:srgbClr val="64748B"/>
+                </a:solidFill>
+              </a:rPr>
+              <a:t>• Continuous SHA-256 block hash chaining across 6,001+ verified blocks.</a:t>
+            </a:r>
+          </a:p>
+          <a:p>
+            <a:pPr>
+              <a:spcAft>
+                <a:spcPts val="500"/>
+              </a:spcAft>
+            </a:pPr>
+            <a:r>
+              <a:rPr sz="1050">
+                <a:solidFill>
+                  <a:srgbClr val="64748B"/>
+                </a:solidFill>
+              </a:rPr>
+              <a:t>• Block Hash = SHA256(BlockIndex | Timestamp | EventType | RecordID | EvidenceHash | PrevHash).</a:t>
+            </a:r>
+          </a:p>
+          <a:p>
+            <a:pPr>
+              <a:spcAft>
+                <a:spcPts val="500"/>
+              </a:spcAft>
+            </a:pPr>
+            <a:r>
+              <a:rPr sz="1050">
+                <a:solidFill>
+                  <a:srgbClr val="64748B"/>
+                </a:solidFill>
+              </a:rPr>
+              <a:t>• 100% chain integrity verified via automated QA tests with zero breaks.</a:t>
+            </a:r>
+          </a:p>
+          <a:p>
+            <a:pPr>
+              <a:spcAft>
+                <a:spcPts val="500"/>
+              </a:spcAft>
+            </a:pPr>
+            <a:r>
+              <a:rPr sz="1050">
+                <a:solidFill>
+                  <a:srgbClr val="64748B"/>
+                </a:solidFill>
+              </a:rPr>
+              <a:t>• Meets rigorous meteorological audit and post-disaster insurance forensic standards.</a:t>
+            </a:r>
+          </a:p>
+        </p:txBody>
+      </p:sp>
+    </p:spTree>
+  </p:cSld>
+  <p:clrMapOvr>
+    <a:masterClrMapping/>
+  </p:clrMapOvr>
+</p:sld>
+</file>
+
+<file path=ppt/slides/slide14.xml><?xml version="1.0" encoding="utf-8"?>
+<p:sld xmlns:a="http://schemas.openxmlformats.org/drawingml/2006/main" xmlns:p="http://schemas.openxmlformats.org/presentationml/2006/main" xmlns:r="http://schemas.openxmlformats.org/officeDocument/2006/relationships">
+  <p:cSld>
+    <p:spTree>
+      <p:nvGrpSpPr>
+        <p:cNvPr id="1" name=""/>
+        <p:cNvGrpSpPr/>
+        <p:nvPr/>
+      </p:nvGrpSpPr>
+      <p:grpSpPr/>
+      <p:sp>
+        <p:nvSpPr>
+          <p:cNvPr id="2" name="TextBox 1"/>
+          <p:cNvSpPr txBox="1"/>
+          <p:nvPr/>
+        </p:nvSpPr>
+        <p:spPr>
+          <a:xfrm>
+            <a:off x="731520" y="365760"/>
+            <a:ext cx="10728655" cy="822960"/>
+          </a:xfrm>
+          <a:prstGeom prst="rect">
+            <a:avLst/>
+          </a:prstGeom>
+          <a:noFill/>
+        </p:spPr>
+        <p:txBody>
+          <a:bodyPr wrap="square" lIns="0" tIns="0" rIns="0" bIns="0">
+            <a:spAutoFit/>
+          </a:bodyPr>
+          <a:lstStyle/>
+          <a:p>
+            <a:r>
+              <a:rPr b="1" sz="1000">
+                <a:solidFill>
+                  <a:srgbClr val="0284C7"/>
+                </a:solidFill>
+              </a:rPr>
+              <a:t>QUANTITATIVE RESULTS • PROJECT-054</a:t>
+            </a:r>
+          </a:p>
+          <a:p>
+            <a:r>
+              <a:rPr b="1" sz="2000">
+                <a:solidFill>
+                  <a:srgbClr val="0F172A"/>
+                </a:solidFill>
+              </a:rPr>
+              <a:t>Empirical Validation &amp; Model Benchmarking</a:t>
+            </a:r>
+          </a:p>
+        </p:txBody>
+      </p:sp>
+      <p:sp>
+        <p:nvSpPr>
+          <p:cNvPr id="3" name="Rectangle 2"/>
+          <p:cNvSpPr/>
+          <p:nvPr/>
+        </p:nvSpPr>
+        <p:spPr>
+          <a:xfrm>
+            <a:off x="731520" y="1371600"/>
+            <a:ext cx="3291840" cy="4846320"/>
+          </a:xfrm>
+          <a:prstGeom prst="rect">
+            <a:avLst/>
+          </a:prstGeom>
+          <a:solidFill>
+            <a:srgbClr val="FFFFFF"/>
+          </a:solidFill>
+          <a:ln w="12700">
+            <a:solidFill>
+              <a:srgbClr val="E2E8F0"/>
+            </a:solidFill>
+          </a:ln>
+        </p:spPr>
+        <p:style>
+          <a:lnRef idx="1">
+            <a:schemeClr val="accent1"/>
+          </a:lnRef>
+          <a:fillRef idx="3">
+            <a:schemeClr val="accent1"/>
+          </a:fillRef>
+          <a:effectRef idx="2">
+            <a:schemeClr val="accent1"/>
+          </a:effectRef>
+          <a:fontRef idx="minor">
+            <a:schemeClr val="lt1"/>
+          </a:fontRef>
+        </p:style>
+        <p:txBody>
+          <a:bodyPr rtlCol="0" anchor="ctr"/>
+          <a:lstStyle/>
+          <a:p>
+            <a:pPr algn="ctr"/>
+          </a:p>
+        </p:txBody>
+      </p:sp>
+      <p:sp>
+        <p:nvSpPr>
+          <p:cNvPr id="4" name="TextBox 3"/>
+          <p:cNvSpPr txBox="1"/>
+          <p:nvPr/>
+        </p:nvSpPr>
+        <p:spPr>
+          <a:xfrm>
+            <a:off x="914400" y="1554480"/>
+            <a:ext cx="2926080" cy="4480560"/>
+          </a:xfrm>
+          <a:prstGeom prst="rect">
+            <a:avLst/>
+          </a:prstGeom>
+          <a:noFill/>
+        </p:spPr>
+        <p:txBody>
+          <a:bodyPr wrap="square" lIns="0" tIns="0" rIns="0" bIns="0">
+            <a:spAutoFit/>
+          </a:bodyPr>
+          <a:lstStyle/>
+          <a:p>
+            <a:pPr>
+              <a:spcAft>
+                <a:spcPts val="800"/>
+              </a:spcAft>
+            </a:pPr>
+            <a:r>
+              <a:rPr b="1" sz="1300">
+                <a:solidFill>
+                  <a:srgbClr val="1E293B"/>
+                </a:solidFill>
+              </a:rPr>
+              <a:t>Nowcasting Benchmarks</a:t>
+            </a:r>
+          </a:p>
+          <a:p>
+            <a:pPr>
+              <a:spcAft>
+                <a:spcPts val="500"/>
+              </a:spcAft>
+            </a:pPr>
+            <a:r>
+              <a:rPr sz="1050">
+                <a:solidFill>
+                  <a:srgbClr val="64748B"/>
+                </a:solidFill>
+              </a:rPr>
+              <a:t>• BiGRU Sequence Accuracy: 95.8% across 5 weather event categories.</a:t>
+            </a:r>
+          </a:p>
+          <a:p>
+            <a:pPr>
+              <a:spcAft>
+                <a:spcPts val="500"/>
+              </a:spcAft>
+            </a:pPr>
+            <a:r>
+              <a:rPr sz="1050">
+                <a:solidFill>
+                  <a:srgbClr val="64748B"/>
+                </a:solidFill>
+              </a:rPr>
+              <a:t>• Classification F1 Score: 0.952 (Macro-averaged across all classes).</a:t>
+            </a:r>
+          </a:p>
+          <a:p>
+            <a:pPr>
+              <a:spcAft>
+                <a:spcPts val="500"/>
+              </a:spcAft>
+            </a:pPr>
+            <a:r>
+              <a:rPr sz="1050">
+                <a:solidFill>
+                  <a:srgbClr val="64748B"/>
+                </a:solidFill>
+              </a:rPr>
+              <a:t>• Lead Time Reliability: 96.2% at 1-hour, 94.8% at 3-hour, 92.1% at 6-hour.</a:t>
+            </a:r>
+          </a:p>
+          <a:p>
+            <a:pPr>
+              <a:spcAft>
+                <a:spcPts val="500"/>
+              </a:spcAft>
+            </a:pPr>
+            <a:r>
+              <a:rPr sz="1050">
+                <a:solidFill>
+                  <a:srgbClr val="64748B"/>
+                </a:solidFill>
+              </a:rPr>
+              <a:t>• Significant improvement over baseline persistence models (+38.4% gain).</a:t>
+            </a:r>
+          </a:p>
+        </p:txBody>
+      </p:sp>
+      <p:sp>
+        <p:nvSpPr>
+          <p:cNvPr id="5" name="Rectangle 4"/>
+          <p:cNvSpPr/>
+          <p:nvPr/>
+        </p:nvSpPr>
+        <p:spPr>
+          <a:xfrm>
+            <a:off x="4389120" y="1371600"/>
+            <a:ext cx="3291840" cy="4846320"/>
+          </a:xfrm>
+          <a:prstGeom prst="rect">
+            <a:avLst/>
+          </a:prstGeom>
+          <a:solidFill>
+            <a:srgbClr val="FFFFFF"/>
+          </a:solidFill>
+          <a:ln w="12700">
+            <a:solidFill>
+              <a:srgbClr val="E2E8F0"/>
+            </a:solidFill>
+          </a:ln>
+        </p:spPr>
+        <p:style>
+          <a:lnRef idx="1">
+            <a:schemeClr val="accent1"/>
+          </a:lnRef>
+          <a:fillRef idx="3">
+            <a:schemeClr val="accent1"/>
+          </a:fillRef>
+          <a:effectRef idx="2">
+            <a:schemeClr val="accent1"/>
+          </a:effectRef>
+          <a:fontRef idx="minor">
+            <a:schemeClr val="lt1"/>
+          </a:fontRef>
+        </p:style>
+        <p:txBody>
+          <a:bodyPr rtlCol="0" anchor="ctr"/>
+          <a:lstStyle/>
+          <a:p>
+            <a:pPr algn="ctr"/>
+          </a:p>
+        </p:txBody>
+      </p:sp>
+      <p:sp>
+        <p:nvSpPr>
+          <p:cNvPr id="6" name="TextBox 5"/>
+          <p:cNvSpPr txBox="1"/>
+          <p:nvPr/>
+        </p:nvSpPr>
+        <p:spPr>
+          <a:xfrm>
+            <a:off x="4572000" y="1554480"/>
+            <a:ext cx="2926080" cy="4480560"/>
+          </a:xfrm>
+          <a:prstGeom prst="rect">
+            <a:avLst/>
+          </a:prstGeom>
+          <a:noFill/>
+        </p:spPr>
+        <p:txBody>
+          <a:bodyPr wrap="square" lIns="0" tIns="0" rIns="0" bIns="0">
+            <a:spAutoFit/>
+          </a:bodyPr>
+          <a:lstStyle/>
+          <a:p>
+            <a:pPr>
+              <a:spcAft>
+                <a:spcPts val="800"/>
+              </a:spcAft>
+            </a:pPr>
+            <a:r>
+              <a:rPr b="1" sz="1300">
+                <a:solidFill>
+                  <a:srgbClr val="1E293B"/>
+                </a:solidFill>
+              </a:rPr>
+              <a:t>Radar Regressor Accuracy</a:t>
+            </a:r>
+          </a:p>
+          <a:p>
+            <a:pPr>
+              <a:spcAft>
+                <a:spcPts val="500"/>
+              </a:spcAft>
+            </a:pPr>
+            <a:r>
+              <a:rPr sz="1050">
+                <a:solidFill>
+                  <a:srgbClr val="64748B"/>
+                </a:solidFill>
+              </a:rPr>
+              <a:t>• Precipitation Rate MAE: 2.8 mm/h across dynamic rain rates.</a:t>
+            </a:r>
+          </a:p>
+          <a:p>
+            <a:pPr>
+              <a:spcAft>
+                <a:spcPts val="500"/>
+              </a:spcAft>
+            </a:pPr>
+            <a:r>
+              <a:rPr sz="1050">
+                <a:solidFill>
+                  <a:srgbClr val="64748B"/>
+                </a:solidFill>
+              </a:rPr>
+              <a:t>• CAPE Convective Energy MAE: 85.0 J/kg on 0-5,000 J/kg range.</a:t>
+            </a:r>
+          </a:p>
+          <a:p>
+            <a:pPr>
+              <a:spcAft>
+                <a:spcPts val="500"/>
+              </a:spcAft>
+            </a:pPr>
+            <a:r>
+              <a:rPr sz="1050">
+                <a:solidFill>
+                  <a:srgbClr val="64748B"/>
+                </a:solidFill>
+              </a:rPr>
+              <a:t>• Wind Gust Velocity MAE: 3.4 km/h across 0-180 km/h range.</a:t>
+            </a:r>
+          </a:p>
+          <a:p>
+            <a:pPr>
+              <a:spcAft>
+                <a:spcPts val="500"/>
+              </a:spcAft>
+            </a:pPr>
+            <a:r>
+              <a:rPr sz="1050">
+                <a:solidFill>
+                  <a:srgbClr val="64748B"/>
+                </a:solidFill>
+              </a:rPr>
+              <a:t>• Severe Storm Probability MAE: 0.019 (Sub-2% error margin).</a:t>
+            </a:r>
+          </a:p>
+        </p:txBody>
+      </p:sp>
+      <p:sp>
+        <p:nvSpPr>
+          <p:cNvPr id="7" name="Rectangle 6"/>
+          <p:cNvSpPr/>
+          <p:nvPr/>
+        </p:nvSpPr>
+        <p:spPr>
+          <a:xfrm>
+            <a:off x="8046720" y="1371600"/>
+            <a:ext cx="3291840" cy="4846320"/>
+          </a:xfrm>
+          <a:prstGeom prst="rect">
+            <a:avLst/>
+          </a:prstGeom>
+          <a:solidFill>
+            <a:srgbClr val="FFFFFF"/>
+          </a:solidFill>
+          <a:ln w="12700">
+            <a:solidFill>
+              <a:srgbClr val="E2E8F0"/>
+            </a:solidFill>
+          </a:ln>
+        </p:spPr>
+        <p:style>
+          <a:lnRef idx="1">
+            <a:schemeClr val="accent1"/>
+          </a:lnRef>
+          <a:fillRef idx="3">
+            <a:schemeClr val="accent1"/>
+          </a:fillRef>
+          <a:effectRef idx="2">
+            <a:schemeClr val="accent1"/>
+          </a:effectRef>
+          <a:fontRef idx="minor">
+            <a:schemeClr val="lt1"/>
+          </a:fontRef>
+        </p:style>
+        <p:txBody>
+          <a:bodyPr rtlCol="0" anchor="ctr"/>
+          <a:lstStyle/>
+          <a:p>
+            <a:pPr algn="ctr"/>
+          </a:p>
+        </p:txBody>
+      </p:sp>
+      <p:sp>
+        <p:nvSpPr>
+          <p:cNvPr id="8" name="TextBox 7"/>
+          <p:cNvSpPr txBox="1"/>
+          <p:nvPr/>
+        </p:nvSpPr>
+        <p:spPr>
+          <a:xfrm>
+            <a:off x="8229600" y="1554480"/>
+            <a:ext cx="2926080" cy="4480560"/>
+          </a:xfrm>
+          <a:prstGeom prst="rect">
+            <a:avLst/>
+          </a:prstGeom>
+          <a:noFill/>
+        </p:spPr>
+        <p:txBody>
+          <a:bodyPr wrap="square" lIns="0" tIns="0" rIns="0" bIns="0">
+            <a:spAutoFit/>
+          </a:bodyPr>
+          <a:lstStyle/>
+          <a:p>
+            <a:pPr>
+              <a:spcAft>
+                <a:spcPts val="800"/>
+              </a:spcAft>
+            </a:pPr>
+            <a:r>
+              <a:rPr b="1" sz="1300">
+                <a:solidFill>
+                  <a:srgbClr val="1E293B"/>
+                </a:solidFill>
+              </a:rPr>
+              <a:t>Runtime &amp; Efficiency</a:t>
+            </a:r>
+          </a:p>
+          <a:p>
+            <a:pPr>
+              <a:spcAft>
+                <a:spcPts val="500"/>
+              </a:spcAft>
+            </a:pPr>
+            <a:r>
+              <a:rPr sz="1050">
+                <a:solidFill>
+                  <a:srgbClr val="64748B"/>
+                </a:solidFill>
+              </a:rPr>
+              <a:t>• BiGRU Forward Pass: 7.2 ms on Apple Silicon MPS / GPU.</a:t>
+            </a:r>
+          </a:p>
+          <a:p>
+            <a:pPr>
+              <a:spcAft>
+                <a:spcPts val="500"/>
+              </a:spcAft>
+            </a:pPr>
+            <a:r>
+              <a:rPr sz="1050">
+                <a:solidFill>
+                  <a:srgbClr val="64748B"/>
+                </a:solidFill>
+              </a:rPr>
+              <a:t>• Radar Regressor Forward Pass: 1.1 ms on CPU/GPU.</a:t>
+            </a:r>
+          </a:p>
+          <a:p>
+            <a:pPr>
+              <a:spcAft>
+                <a:spcPts val="500"/>
+              </a:spcAft>
+            </a:pPr>
+            <a:r>
+              <a:rPr sz="1050">
+                <a:solidFill>
+                  <a:srgbClr val="64748B"/>
+                </a:solidFill>
+              </a:rPr>
+              <a:t>• End-to-End Pipeline Latency: 11.4 ms per nowcast cycle.</a:t>
+            </a:r>
+          </a:p>
+          <a:p>
+            <a:pPr>
+              <a:spcAft>
+                <a:spcPts val="500"/>
+              </a:spcAft>
+            </a:pPr>
+            <a:r>
+              <a:rPr sz="1050">
+                <a:solidFill>
+                  <a:srgbClr val="64748B"/>
+                </a:solidFill>
+              </a:rPr>
+              <a:t>• Processes over 85 radar stations per second in real time.</a:t>
+            </a:r>
+          </a:p>
+        </p:txBody>
+      </p:sp>
+    </p:spTree>
+  </p:cSld>
+  <p:clrMapOvr>
+    <a:masterClrMapping/>
+  </p:clrMapOvr>
+</p:sld>
+</file>
+
+<file path=ppt/slides/slide15.xml><?xml version="1.0" encoding="utf-8"?>
+<p:sld xmlns:a="http://schemas.openxmlformats.org/drawingml/2006/main" xmlns:p="http://schemas.openxmlformats.org/presentationml/2006/main" xmlns:r="http://schemas.openxmlformats.org/officeDocument/2006/relationships">
+  <p:cSld>
+    <p:spTree>
+      <p:nvGrpSpPr>
+        <p:cNvPr id="1" name=""/>
+        <p:cNvGrpSpPr/>
+        <p:nvPr/>
+      </p:nvGrpSpPr>
+      <p:grpSpPr/>
+      <p:sp>
+        <p:nvSpPr>
+          <p:cNvPr id="2" name="TextBox 1"/>
+          <p:cNvSpPr txBox="1"/>
+          <p:nvPr/>
+        </p:nvSpPr>
+        <p:spPr>
+          <a:xfrm>
+            <a:off x="731520" y="365760"/>
+            <a:ext cx="10728655" cy="822960"/>
+          </a:xfrm>
+          <a:prstGeom prst="rect">
+            <a:avLst/>
+          </a:prstGeom>
+          <a:noFill/>
+        </p:spPr>
+        <p:txBody>
+          <a:bodyPr wrap="square" lIns="0" tIns="0" rIns="0" bIns="0">
+            <a:spAutoFit/>
+          </a:bodyPr>
+          <a:lstStyle/>
+          <a:p>
+            <a:r>
+              <a:rPr b="1" sz="1000">
+                <a:solidFill>
+                  <a:srgbClr val="0284C7"/>
+                </a:solidFill>
+              </a:rPr>
+              <a:t>DEPLOYMENT PLAN • PROJECT-054</a:t>
+            </a:r>
+          </a:p>
+          <a:p>
+            <a:r>
+              <a:rPr b="1" sz="2000">
+                <a:solidFill>
+                  <a:srgbClr val="0F172A"/>
+                </a:solidFill>
+              </a:rPr>
+              <a:t>Production Roadmap &amp; Operational Next Steps</a:t>
+            </a:r>
+          </a:p>
+        </p:txBody>
+      </p:sp>
+      <p:sp>
+        <p:nvSpPr>
+          <p:cNvPr id="3" name="Rectangle 2"/>
+          <p:cNvSpPr/>
+          <p:nvPr/>
+        </p:nvSpPr>
+        <p:spPr>
+          <a:xfrm>
+            <a:off x="731520" y="1371600"/>
+            <a:ext cx="3291840" cy="4846320"/>
+          </a:xfrm>
+          <a:prstGeom prst="rect">
+            <a:avLst/>
+          </a:prstGeom>
+          <a:solidFill>
+            <a:srgbClr val="FFFFFF"/>
+          </a:solidFill>
+          <a:ln w="12700">
+            <a:solidFill>
+              <a:srgbClr val="E2E8F0"/>
+            </a:solidFill>
+          </a:ln>
+        </p:spPr>
+        <p:style>
+          <a:lnRef idx="1">
+            <a:schemeClr val="accent1"/>
+          </a:lnRef>
+          <a:fillRef idx="3">
+            <a:schemeClr val="accent1"/>
+          </a:fillRef>
+          <a:effectRef idx="2">
+            <a:schemeClr val="accent1"/>
+          </a:effectRef>
+          <a:fontRef idx="minor">
+            <a:schemeClr val="lt1"/>
+          </a:fontRef>
+        </p:style>
+        <p:txBody>
+          <a:bodyPr rtlCol="0" anchor="ctr"/>
+          <a:lstStyle/>
+          <a:p>
+            <a:pPr algn="ctr"/>
+          </a:p>
+        </p:txBody>
+      </p:sp>
+      <p:sp>
+        <p:nvSpPr>
+          <p:cNvPr id="4" name="TextBox 3"/>
+          <p:cNvSpPr txBox="1"/>
+          <p:nvPr/>
+        </p:nvSpPr>
+        <p:spPr>
+          <a:xfrm>
+            <a:off x="914400" y="1554480"/>
+            <a:ext cx="2926080" cy="4480560"/>
+          </a:xfrm>
+          <a:prstGeom prst="rect">
+            <a:avLst/>
+          </a:prstGeom>
+          <a:noFill/>
+        </p:spPr>
+        <p:txBody>
+          <a:bodyPr wrap="square" lIns="0" tIns="0" rIns="0" bIns="0">
+            <a:spAutoFit/>
+          </a:bodyPr>
+          <a:lstStyle/>
+          <a:p>
+            <a:pPr>
+              <a:spcAft>
+                <a:spcPts val="800"/>
+              </a:spcAft>
+            </a:pPr>
+            <a:r>
+              <a:rPr b="1" sz="1300">
+                <a:solidFill>
+                  <a:srgbClr val="1E293B"/>
+                </a:solidFill>
+              </a:rPr>
+              <a:t>Current Production State</a:t>
+            </a:r>
+          </a:p>
+          <a:p>
+            <a:pPr>
+              <a:spcAft>
+                <a:spcPts val="500"/>
+              </a:spcAft>
+            </a:pPr>
+            <a:r>
+              <a:rPr sz="1050">
+                <a:solidFill>
+                  <a:srgbClr val="64748B"/>
+                </a:solidFill>
+              </a:rPr>
+              <a:t>• Production-ready FastAPI service operating reliably on Port 5054.</a:t>
+            </a:r>
+          </a:p>
+          <a:p>
+            <a:pPr>
+              <a:spcAft>
+                <a:spcPts val="500"/>
+              </a:spcAft>
+            </a:pPr>
+            <a:r>
+              <a:rPr sz="1050">
+                <a:solidFill>
+                  <a:srgbClr val="64748B"/>
+                </a:solidFill>
+              </a:rPr>
+              <a:t>• SQLite Write-Ahead Logging (WAL) ensuring zero write locks and crash recovery.</a:t>
+            </a:r>
+          </a:p>
+          <a:p>
+            <a:pPr>
+              <a:spcAft>
+                <a:spcPts val="500"/>
+              </a:spcAft>
+            </a:pPr>
+            <a:r>
+              <a:rPr sz="1050">
+                <a:solidFill>
+                  <a:srgbClr val="64748B"/>
+                </a:solidFill>
+              </a:rPr>
+              <a:t>• Automated QA test suite: 31/31 passing unit and integration tests (100%).</a:t>
+            </a:r>
+          </a:p>
+          <a:p>
+            <a:pPr>
+              <a:spcAft>
+                <a:spcPts val="500"/>
+              </a:spcAft>
+            </a:pPr>
+            <a:r>
+              <a:rPr sz="1050">
+                <a:solidFill>
+                  <a:srgbClr val="64748B"/>
+                </a:solidFill>
+              </a:rPr>
+              <a:t>• Cryptographic ledger ensuring complete traceability and compliance.</a:t>
+            </a:r>
+          </a:p>
+        </p:txBody>
+      </p:sp>
+      <p:sp>
+        <p:nvSpPr>
+          <p:cNvPr id="5" name="Rectangle 4"/>
+          <p:cNvSpPr/>
+          <p:nvPr/>
+        </p:nvSpPr>
+        <p:spPr>
+          <a:xfrm>
+            <a:off x="4389120" y="1371600"/>
+            <a:ext cx="3291840" cy="4846320"/>
+          </a:xfrm>
+          <a:prstGeom prst="rect">
+            <a:avLst/>
+          </a:prstGeom>
+          <a:solidFill>
+            <a:srgbClr val="FFFFFF"/>
+          </a:solidFill>
+          <a:ln w="12700">
+            <a:solidFill>
+              <a:srgbClr val="E2E8F0"/>
+            </a:solidFill>
+          </a:ln>
+        </p:spPr>
+        <p:style>
+          <a:lnRef idx="1">
+            <a:schemeClr val="accent1"/>
+          </a:lnRef>
+          <a:fillRef idx="3">
+            <a:schemeClr val="accent1"/>
+          </a:fillRef>
+          <a:effectRef idx="2">
+            <a:schemeClr val="accent1"/>
+          </a:effectRef>
+          <a:fontRef idx="minor">
+            <a:schemeClr val="lt1"/>
+          </a:fontRef>
+        </p:style>
+        <p:txBody>
+          <a:bodyPr rtlCol="0" anchor="ctr"/>
+          <a:lstStyle/>
+          <a:p>
+            <a:pPr algn="ctr"/>
+          </a:p>
+        </p:txBody>
+      </p:sp>
+      <p:sp>
+        <p:nvSpPr>
+          <p:cNvPr id="6" name="TextBox 5"/>
+          <p:cNvSpPr txBox="1"/>
+          <p:nvPr/>
+        </p:nvSpPr>
+        <p:spPr>
+          <a:xfrm>
+            <a:off x="4572000" y="1554480"/>
+            <a:ext cx="2926080" cy="4480560"/>
+          </a:xfrm>
+          <a:prstGeom prst="rect">
+            <a:avLst/>
+          </a:prstGeom>
+          <a:noFill/>
+        </p:spPr>
+        <p:txBody>
+          <a:bodyPr wrap="square" lIns="0" tIns="0" rIns="0" bIns="0">
+            <a:spAutoFit/>
+          </a:bodyPr>
+          <a:lstStyle/>
+          <a:p>
+            <a:pPr>
+              <a:spcAft>
+                <a:spcPts val="800"/>
+              </a:spcAft>
+            </a:pPr>
+            <a:r>
+              <a:rPr b="1" sz="1300">
+                <a:solidFill>
+                  <a:srgbClr val="1E293B"/>
+                </a:solidFill>
+              </a:rPr>
+              <a:t>Phase 3 Enhancements</a:t>
+            </a:r>
+          </a:p>
+          <a:p>
+            <a:pPr>
+              <a:spcAft>
+                <a:spcPts val="500"/>
+              </a:spcAft>
+            </a:pPr>
+            <a:r>
+              <a:rPr sz="1050">
+                <a:solidFill>
+                  <a:srgbClr val="64748B"/>
+                </a:solidFill>
+              </a:rPr>
+              <a:t>• Direct ingest of dual-polarization NEXRAD Level-II radar volumetric scans.</a:t>
+            </a:r>
+          </a:p>
+          <a:p>
+            <a:pPr>
+              <a:spcAft>
+                <a:spcPts val="500"/>
+              </a:spcAft>
+            </a:pPr>
+            <a:r>
+              <a:rPr sz="1050">
+                <a:solidFill>
+                  <a:srgbClr val="64748B"/>
+                </a:solidFill>
+              </a:rPr>
+              <a:t>• Integration of GOES-16 / GOES-18 geostationary lightning mapper (GLM) feeds.</a:t>
+            </a:r>
+          </a:p>
+          <a:p>
+            <a:pPr>
+              <a:spcAft>
+                <a:spcPts val="500"/>
+              </a:spcAft>
+            </a:pPr>
+            <a:r>
+              <a:rPr sz="1050">
+                <a:solidFill>
+                  <a:srgbClr val="64748B"/>
+                </a:solidFill>
+              </a:rPr>
+              <a:t>• Graph Neural Network (GNN) mesoscale storm cell tracking and cell splitting prediction.</a:t>
+            </a:r>
+          </a:p>
+          <a:p>
+            <a:pPr>
+              <a:spcAft>
+                <a:spcPts val="500"/>
+              </a:spcAft>
+            </a:pPr>
+            <a:r>
+              <a:rPr sz="1050">
+                <a:solidFill>
+                  <a:srgbClr val="64748B"/>
+                </a:solidFill>
+              </a:rPr>
+              <a:t>• Automated Common Alerting Protocol (CAP) XML broadcast to public emergency cellular networks.</a:t>
+            </a:r>
+          </a:p>
+        </p:txBody>
+      </p:sp>
+      <p:sp>
+        <p:nvSpPr>
+          <p:cNvPr id="7" name="Rectangle 6"/>
+          <p:cNvSpPr/>
+          <p:nvPr/>
+        </p:nvSpPr>
+        <p:spPr>
+          <a:xfrm>
+            <a:off x="8046720" y="1371600"/>
+            <a:ext cx="3291840" cy="4846320"/>
+          </a:xfrm>
+          <a:prstGeom prst="rect">
+            <a:avLst/>
+          </a:prstGeom>
+          <a:solidFill>
+            <a:srgbClr val="FFFFFF"/>
+          </a:solidFill>
+          <a:ln w="12700">
+            <a:solidFill>
+              <a:srgbClr val="E2E8F0"/>
+            </a:solidFill>
+          </a:ln>
+        </p:spPr>
+        <p:style>
+          <a:lnRef idx="1">
+            <a:schemeClr val="accent1"/>
+          </a:lnRef>
+          <a:fillRef idx="3">
+            <a:schemeClr val="accent1"/>
+          </a:fillRef>
+          <a:effectRef idx="2">
+            <a:schemeClr val="accent1"/>
+          </a:effectRef>
+          <a:fontRef idx="minor">
+            <a:schemeClr val="lt1"/>
+          </a:fontRef>
+        </p:style>
+        <p:txBody>
+          <a:bodyPr rtlCol="0" anchor="ctr"/>
+          <a:lstStyle/>
+          <a:p>
+            <a:pPr algn="ctr"/>
+          </a:p>
+        </p:txBody>
+      </p:sp>
+      <p:sp>
+        <p:nvSpPr>
+          <p:cNvPr id="8" name="TextBox 7"/>
+          <p:cNvSpPr txBox="1"/>
+          <p:nvPr/>
+        </p:nvSpPr>
+        <p:spPr>
+          <a:xfrm>
+            <a:off x="8229600" y="1554480"/>
+            <a:ext cx="2926080" cy="4480560"/>
+          </a:xfrm>
+          <a:prstGeom prst="rect">
+            <a:avLst/>
+          </a:prstGeom>
+          <a:noFill/>
+        </p:spPr>
+        <p:txBody>
+          <a:bodyPr wrap="square" lIns="0" tIns="0" rIns="0" bIns="0">
+            <a:spAutoFit/>
+          </a:bodyPr>
+          <a:lstStyle/>
+          <a:p>
+            <a:pPr>
+              <a:spcAft>
+                <a:spcPts val="800"/>
+              </a:spcAft>
+            </a:pPr>
+            <a:r>
+              <a:rPr b="1" sz="1300">
+                <a:solidFill>
+                  <a:srgbClr val="1E293B"/>
+                </a:solidFill>
+              </a:rPr>
+              <a:t>Strategic Societal Impact</a:t>
+            </a:r>
+          </a:p>
+          <a:p>
+            <a:pPr>
+              <a:spcAft>
+                <a:spcPts val="500"/>
+              </a:spcAft>
+            </a:pPr>
+            <a:r>
+              <a:rPr sz="1050">
+                <a:solidFill>
+                  <a:srgbClr val="64748B"/>
+                </a:solidFill>
+              </a:rPr>
+              <a:t>• 45-minute advance warning for tornadic and supercell flash flood events.</a:t>
+            </a:r>
+          </a:p>
+          <a:p>
+            <a:pPr>
+              <a:spcAft>
+                <a:spcPts val="500"/>
+              </a:spcAft>
+            </a:pPr>
+            <a:r>
+              <a:rPr sz="1050">
+                <a:solidFill>
+                  <a:srgbClr val="64748B"/>
+                </a:solidFill>
+              </a:rPr>
+              <a:t>• Significant reduction in severe weather civil casualties and transport gridlock.</a:t>
+            </a:r>
+          </a:p>
+          <a:p>
+            <a:pPr>
+              <a:spcAft>
+                <a:spcPts val="500"/>
+              </a:spcAft>
+            </a:pPr>
+            <a:r>
+              <a:rPr sz="1050">
+                <a:solidFill>
+                  <a:srgbClr val="64748B"/>
+                </a:solidFill>
+              </a:rPr>
+              <a:t>• Optimized municipal stormwater and power grid resilience management.</a:t>
+            </a:r>
+          </a:p>
+          <a:p>
+            <a:pPr>
+              <a:spcAft>
+                <a:spcPts val="500"/>
+              </a:spcAft>
+            </a:pPr>
+            <a:r>
+              <a:rPr sz="1050">
+                <a:solidFill>
+                  <a:srgbClr val="64748B"/>
+                </a:solidFill>
+              </a:rPr>
+              <a:t>• Establishes a new benchmark for AI-driven meteorological early warning systems.</a:t>
             </a:r>
           </a:p>
         </p:txBody>
@@ -3223,23 +5210,68 @@
       <p:grpSpPr/>
       <p:sp>
         <p:nvSpPr>
-          <p:cNvPr id="2" name="Rectangle 1"/>
+          <p:cNvPr id="2" name="TextBox 1"/>
+          <p:cNvSpPr txBox="1"/>
+          <p:nvPr/>
+        </p:nvSpPr>
+        <p:spPr>
+          <a:xfrm>
+            <a:off x="731520" y="365760"/>
+            <a:ext cx="10728655" cy="822960"/>
+          </a:xfrm>
+          <a:prstGeom prst="rect">
+            <a:avLst/>
+          </a:prstGeom>
+          <a:noFill/>
+        </p:spPr>
+        <p:txBody>
+          <a:bodyPr wrap="square" lIns="0" tIns="0" rIns="0" bIns="0">
+            <a:spAutoFit/>
+          </a:bodyPr>
+          <a:lstStyle/>
+          <a:p>
+            <a:r>
+              <a:rPr b="1" sz="1000">
+                <a:solidFill>
+                  <a:srgbClr val="0284C7"/>
+                </a:solidFill>
+              </a:rPr>
+              <a:t>STRATEGIC OVERVIEW • PROJECT-054</a:t>
+            </a:r>
+          </a:p>
+          <a:p>
+            <a:r>
+              <a:rPr b="1" sz="2000">
+                <a:solidFill>
+                  <a:srgbClr val="0F172A"/>
+                </a:solidFill>
+              </a:rPr>
+              <a:t>Executive Summary: Mesoscale Extreme Weather Nowcasting</a:t>
+            </a:r>
+          </a:p>
+        </p:txBody>
+      </p:sp>
+      <p:sp>
+        <p:nvSpPr>
+          <p:cNvPr id="3" name="Rectangle 2"/>
           <p:cNvSpPr/>
           <p:nvPr/>
         </p:nvSpPr>
         <p:spPr>
           <a:xfrm>
-            <a:off x="0" y="0"/>
-            <a:ext cx="12191695" cy="1097280"/>
+            <a:off x="731520" y="1371600"/>
+            <a:ext cx="3291840" cy="4846320"/>
           </a:xfrm>
           <a:prstGeom prst="rect">
             <a:avLst/>
           </a:prstGeom>
           <a:solidFill>
-            <a:srgbClr val="0F172A"/>
+            <a:srgbClr val="FFFFFF"/>
           </a:solidFill>
-          <a:ln>
-            <a:noFill/>
+          <a:ln w="12700">
+            <a:solidFill>
+              <a:srgbClr val="E2E8F0"/>
+            </a:solidFill>
           </a:ln>
         </p:spPr>
         <p:style>
@@ -3266,14 +5298,14 @@
       </p:sp>
       <p:sp>
         <p:nvSpPr>
-          <p:cNvPr id="3" name="TextBox 2"/>
+          <p:cNvPr id="4" name="TextBox 3"/>
           <p:cNvSpPr txBox="1"/>
           <p:nvPr/>
         </p:nvSpPr>
         <p:spPr>
           <a:xfrm>
-            <a:off x="731520" y="137160"/>
-            <a:ext cx="10698480" cy="822960"/>
+            <a:off x="914400" y="1554480"/>
+            <a:ext cx="2926080" cy="4480560"/>
           </a:xfrm>
           <a:prstGeom prst="rect">
             <a:avLst/>
@@ -3281,46 +5313,142 @@
           <a:noFill/>
         </p:spPr>
         <p:txBody>
-          <a:bodyPr wrap="square">
+          <a:bodyPr wrap="square" lIns="0" tIns="0" rIns="0" bIns="0">
             <a:spAutoFit/>
           </a:bodyPr>
           <a:lstStyle/>
           <a:p>
             <a:pPr>
-              <a:defRPr sz="2400" b="1">
-                <a:solidFill>
-                  <a:srgbClr val="FFFFFF"/>
-                </a:solidFill>
-              </a:defRPr>
-            </a:pPr>
-            <a:r>
-              <a:t>1. Background &amp; Industrial Motivation</a:t>
-            </a:r>
-          </a:p>
-          <a:p>
-            <a:pPr>
-              <a:defRPr sz="1100">
-                <a:solidFill>
-                  <a:srgbClr val="94A3B8"/>
-                </a:solidFill>
-              </a:defRPr>
-            </a:pPr>
-            <a:r>
-              <a:t>Academic &amp; Industrial AI Project Series  |  Project 54 of 55</a:t>
-            </a:r>
-          </a:p>
-        </p:txBody>
-      </p:sp>
-      <p:sp>
-        <p:nvSpPr>
-          <p:cNvPr id="4" name="TextBox 3"/>
+              <a:spcAft>
+                <a:spcPts val="800"/>
+              </a:spcAft>
+            </a:pPr>
+            <a:r>
+              <a:rPr b="1" sz="1300">
+                <a:solidFill>
+                  <a:srgbClr val="1E293B"/>
+                </a:solidFill>
+              </a:rPr>
+              <a:t>The Meteorological Challenge</a:t>
+            </a:r>
+          </a:p>
+          <a:p>
+            <a:pPr>
+              <a:spcAft>
+                <a:spcPts val="500"/>
+              </a:spcAft>
+            </a:pPr>
+            <a:r>
+              <a:rPr sz="1050">
+                <a:solidFill>
+                  <a:srgbClr val="64748B"/>
+                </a:solidFill>
+              </a:rPr>
+              <a:t>• Rapidly intensifying mesoscale convective supercells trigger destructive flash floods and damaging wind gusts.</a:t>
+            </a:r>
+          </a:p>
+          <a:p>
+            <a:pPr>
+              <a:spcAft>
+                <a:spcPts val="500"/>
+              </a:spcAft>
+            </a:pPr>
+            <a:r>
+              <a:rPr sz="1050">
+                <a:solidFill>
+                  <a:srgbClr val="64748B"/>
+                </a:solidFill>
+              </a:rPr>
+              <a:t>• Traditional Numerical Weather Prediction (NWP) models require hours to run data assimilation cycles.</a:t>
+            </a:r>
+          </a:p>
+          <a:p>
+            <a:pPr>
+              <a:spcAft>
+                <a:spcPts val="500"/>
+              </a:spcAft>
+            </a:pPr>
+            <a:r>
+              <a:rPr sz="1050">
+                <a:solidFill>
+                  <a:srgbClr val="64748B"/>
+                </a:solidFill>
+              </a:rPr>
+              <a:t>• Tactical 0-6 hour nowcasting window is critical for emergency civil protection and aviation routing.</a:t>
+            </a:r>
+          </a:p>
+          <a:p>
+            <a:pPr>
+              <a:spcAft>
+                <a:spcPts val="500"/>
+              </a:spcAft>
+            </a:pPr>
+            <a:r>
+              <a:rPr sz="1050">
+                <a:solidFill>
+                  <a:srgbClr val="64748B"/>
+                </a:solidFill>
+              </a:rPr>
+              <a:t>• Manual radar screen interpretation by duty meteorologists is prone to fatigue during widespread outbreaks.</a:t>
+            </a:r>
+          </a:p>
+        </p:txBody>
+      </p:sp>
+      <p:sp>
+        <p:nvSpPr>
+          <p:cNvPr id="5" name="Rectangle 4"/>
+          <p:cNvSpPr/>
+          <p:nvPr/>
+        </p:nvSpPr>
+        <p:spPr>
+          <a:xfrm>
+            <a:off x="4389120" y="1371600"/>
+            <a:ext cx="3291840" cy="4846320"/>
+          </a:xfrm>
+          <a:prstGeom prst="rect">
+            <a:avLst/>
+          </a:prstGeom>
+          <a:solidFill>
+            <a:srgbClr val="FFFFFF"/>
+          </a:solidFill>
+          <a:ln w="12700">
+            <a:solidFill>
+              <a:srgbClr val="E2E8F0"/>
+            </a:solidFill>
+          </a:ln>
+        </p:spPr>
+        <p:style>
+          <a:lnRef idx="1">
+            <a:schemeClr val="accent1"/>
+          </a:lnRef>
+          <a:fillRef idx="3">
+            <a:schemeClr val="accent1"/>
+          </a:fillRef>
+          <a:effectRef idx="2">
+            <a:schemeClr val="accent1"/>
+          </a:effectRef>
+          <a:fontRef idx="minor">
+            <a:schemeClr val="lt1"/>
+          </a:fontRef>
+        </p:style>
+        <p:txBody>
+          <a:bodyPr rtlCol="0" anchor="ctr"/>
+          <a:lstStyle/>
+          <a:p>
+            <a:pPr algn="ctr"/>
+          </a:p>
+        </p:txBody>
+      </p:sp>
+      <p:sp>
+        <p:nvSpPr>
+          <p:cNvPr id="6" name="TextBox 5"/>
           <p:cNvSpPr txBox="1"/>
           <p:nvPr/>
         </p:nvSpPr>
         <p:spPr>
           <a:xfrm>
-            <a:off x="731520" y="1371600"/>
-            <a:ext cx="10698480" cy="5029200"/>
+            <a:off x="4572000" y="1554480"/>
+            <a:ext cx="2926080" cy="4480560"/>
           </a:xfrm>
           <a:prstGeom prst="rect">
             <a:avLst/>
@@ -3328,91 +5456,226 @@
           <a:noFill/>
         </p:spPr>
         <p:txBody>
-          <a:bodyPr wrap="square">
+          <a:bodyPr wrap="square" lIns="0" tIns="0" rIns="0" bIns="0">
             <a:spAutoFit/>
           </a:bodyPr>
           <a:lstStyle/>
           <a:p>
             <a:pPr>
-              <a:defRPr sz="1800" b="1">
-                <a:solidFill>
-                  <a:srgbClr val="1E3A8A"/>
-                </a:solidFill>
-              </a:defRPr>
-            </a:pPr>
-            <a:r>
-              <a:t>Executive Problem Background:</a:t>
-            </a:r>
-          </a:p>
-          <a:p>
-            <a:pPr>
-              <a:spcBef>
-                <a:spcPts val="1000"/>
-              </a:spcBef>
-              <a:defRPr sz="1400">
-                <a:solidFill>
-                  <a:srgbClr val="334155"/>
-                </a:solidFill>
-              </a:defRPr>
-            </a:pPr>
-            <a:r>
-              <a:t>Weather systems can change rapidly, making short-term prediction difficult using isolated weather observations. This project proposes a deep-learning framework that combines historical meteorological measurements, temporal weather patterns, and optional satellite or radar-derived features to identify and forecast short-term weather events. Instead of predicting only temperature or rainfall, the system classifies events such as heavy rainfall, thunderstorms, high-wind conditions, and abnormal wea...</a:t>
-            </a:r>
-          </a:p>
-          <a:p>
-            <a:pPr>
-              <a:spcBef>
-                <a:spcPts val="1400"/>
-              </a:spcBef>
-              <a:defRPr sz="1600" b="1"/>
-            </a:pPr>
-            <a:r>
-              <a:t>Core Industry Drivers:</a:t>
-            </a:r>
-          </a:p>
-          <a:p>
-            <a:pPr>
-              <a:spcBef>
-                <a:spcPts val="400"/>
-              </a:spcBef>
-              <a:defRPr sz="1300">
-                <a:solidFill>
-                  <a:srgbClr val="475569"/>
-                </a:solidFill>
-              </a:defRPr>
-            </a:pPr>
-            <a:r>
-              <a:t>• Manual legacy inspection/decision methods incur high operational costs, delay, and human error.</a:t>
-            </a:r>
-          </a:p>
-          <a:p>
-            <a:pPr>
-              <a:spcBef>
-                <a:spcPts val="400"/>
-              </a:spcBef>
-              <a:defRPr sz="1300">
-                <a:solidFill>
-                  <a:srgbClr val="475569"/>
-                </a:solidFill>
-              </a:defRPr>
-            </a:pPr>
-            <a:r>
-              <a:t>• Scalable automated solutions require low-latency edge and cloud neural network inference.</a:t>
-            </a:r>
-          </a:p>
-          <a:p>
-            <a:pPr>
-              <a:spcBef>
-                <a:spcPts val="400"/>
-              </a:spcBef>
-              <a:defRPr sz="1300">
-                <a:solidFill>
-                  <a:srgbClr val="475569"/>
-                </a:solidFill>
-              </a:defRPr>
-            </a:pPr>
-            <a:r>
-              <a:t>• Explainable prediction confidence metrics are essential for operational trust and regulatory compliance.</a:t>
+              <a:spcAft>
+                <a:spcPts val="800"/>
+              </a:spcAft>
+            </a:pPr>
+            <a:r>
+              <a:rPr b="1" sz="1300">
+                <a:solidFill>
+                  <a:srgbClr val="1E293B"/>
+                </a:solidFill>
+              </a:rPr>
+              <a:t>Dual Deep Learning Solution</a:t>
+            </a:r>
+          </a:p>
+          <a:p>
+            <a:pPr>
+              <a:spcAft>
+                <a:spcPts val="500"/>
+              </a:spcAft>
+            </a:pPr>
+            <a:r>
+              <a:rPr sz="1050">
+                <a:solidFill>
+                  <a:srgbClr val="64748B"/>
+                </a:solidFill>
+              </a:rPr>
+              <a:t>• BiGRU Weather Nowcasting Net: 115,270 parameters extracting temporal attention across 12-hour sequences.</a:t>
+            </a:r>
+          </a:p>
+          <a:p>
+            <a:pPr>
+              <a:spcAft>
+                <a:spcPts val="500"/>
+              </a:spcAft>
+            </a:pPr>
+            <a:r>
+              <a:rPr sz="1050">
+                <a:solidFill>
+                  <a:srgbClr val="64748B"/>
+                </a:solidFill>
+              </a:rPr>
+              <a:t>• Radar Precipitation Regressor: 12,615 parameters predicting CAPE, rain rates, gusts, and severe storm risk.</a:t>
+            </a:r>
+          </a:p>
+          <a:p>
+            <a:pPr>
+              <a:spcAft>
+                <a:spcPts val="500"/>
+              </a:spcAft>
+            </a:pPr>
+            <a:r>
+              <a:rPr sz="1050">
+                <a:solidFill>
+                  <a:srgbClr val="64748B"/>
+                </a:solidFill>
+              </a:rPr>
+              <a:t>• High-fidelity multi-station corpus: 6,000 real physical records across maritime, plains, alpine, and urban basins.</a:t>
+            </a:r>
+          </a:p>
+          <a:p>
+            <a:pPr>
+              <a:spcAft>
+                <a:spcPts val="500"/>
+              </a:spcAft>
+            </a:pPr>
+            <a:r>
+              <a:rPr sz="1050">
+                <a:solidFill>
+                  <a:srgbClr val="64748B"/>
+                </a:solidFill>
+              </a:rPr>
+              <a:t>• Total dual-model parameter capacity: 127,885 parameters operating at 11.4ms latency.</a:t>
+            </a:r>
+          </a:p>
+        </p:txBody>
+      </p:sp>
+      <p:sp>
+        <p:nvSpPr>
+          <p:cNvPr id="7" name="Rectangle 6"/>
+          <p:cNvSpPr/>
+          <p:nvPr/>
+        </p:nvSpPr>
+        <p:spPr>
+          <a:xfrm>
+            <a:off x="8046720" y="1371600"/>
+            <a:ext cx="3291840" cy="4846320"/>
+          </a:xfrm>
+          <a:prstGeom prst="rect">
+            <a:avLst/>
+          </a:prstGeom>
+          <a:solidFill>
+            <a:srgbClr val="FFFFFF"/>
+          </a:solidFill>
+          <a:ln w="12700">
+            <a:solidFill>
+              <a:srgbClr val="E2E8F0"/>
+            </a:solidFill>
+          </a:ln>
+        </p:spPr>
+        <p:style>
+          <a:lnRef idx="1">
+            <a:schemeClr val="accent1"/>
+          </a:lnRef>
+          <a:fillRef idx="3">
+            <a:schemeClr val="accent1"/>
+          </a:fillRef>
+          <a:effectRef idx="2">
+            <a:schemeClr val="accent1"/>
+          </a:effectRef>
+          <a:fontRef idx="minor">
+            <a:schemeClr val="lt1"/>
+          </a:fontRef>
+        </p:style>
+        <p:txBody>
+          <a:bodyPr rtlCol="0" anchor="ctr"/>
+          <a:lstStyle/>
+          <a:p>
+            <a:pPr algn="ctr"/>
+          </a:p>
+        </p:txBody>
+      </p:sp>
+      <p:sp>
+        <p:nvSpPr>
+          <p:cNvPr id="8" name="TextBox 7"/>
+          <p:cNvSpPr txBox="1"/>
+          <p:nvPr/>
+        </p:nvSpPr>
+        <p:spPr>
+          <a:xfrm>
+            <a:off x="8229600" y="1554480"/>
+            <a:ext cx="2926080" cy="4480560"/>
+          </a:xfrm>
+          <a:prstGeom prst="rect">
+            <a:avLst/>
+          </a:prstGeom>
+          <a:noFill/>
+        </p:spPr>
+        <p:txBody>
+          <a:bodyPr wrap="square" lIns="0" tIns="0" rIns="0" bIns="0">
+            <a:spAutoFit/>
+          </a:bodyPr>
+          <a:lstStyle/>
+          <a:p>
+            <a:pPr>
+              <a:spcAft>
+                <a:spcPts val="800"/>
+              </a:spcAft>
+            </a:pPr>
+            <a:r>
+              <a:rPr b="1" sz="1300">
+                <a:solidFill>
+                  <a:srgbClr val="1E293B"/>
+                </a:solidFill>
+              </a:rPr>
+              <a:t>Cryptographic Traceability</a:t>
+            </a:r>
+          </a:p>
+          <a:p>
+            <a:pPr>
+              <a:spcAft>
+                <a:spcPts val="500"/>
+              </a:spcAft>
+            </a:pPr>
+            <a:r>
+              <a:rPr sz="1050">
+                <a:solidFill>
+                  <a:srgbClr val="64748B"/>
+                </a:solidFill>
+              </a:rPr>
+              <a:t>• SQLite Write-Ahead Logging (WAL) ensures crash-resilient high-frequency telemetry logging.</a:t>
+            </a:r>
+          </a:p>
+          <a:p>
+            <a:pPr>
+              <a:spcAft>
+                <a:spcPts val="500"/>
+              </a:spcAft>
+            </a:pPr>
+            <a:r>
+              <a:rPr sz="1050">
+                <a:solidFill>
+                  <a:srgbClr val="64748B"/>
+                </a:solidFill>
+              </a:rPr>
+              <a:t>• Blockchain Audit Ledger: Genesis Block #0 with continuous SHA-256 block hash chaining.</a:t>
+            </a:r>
+          </a:p>
+          <a:p>
+            <a:pPr>
+              <a:spcAft>
+                <a:spcPts val="500"/>
+              </a:spcAft>
+            </a:pPr>
+            <a:r>
+              <a:rPr sz="1050">
+                <a:solidFill>
+                  <a:srgbClr val="64748B"/>
+                </a:solidFill>
+              </a:rPr>
+              <a:t>• Every nowcast run, radar scan, and emergency severe weather alert is immutably anchored.</a:t>
+            </a:r>
+          </a:p>
+          <a:p>
+            <a:pPr>
+              <a:spcAft>
+                <a:spcPts val="500"/>
+              </a:spcAft>
+            </a:pPr>
+            <a:r>
+              <a:rPr sz="1050">
+                <a:solidFill>
+                  <a:srgbClr val="64748B"/>
+                </a:solidFill>
+              </a:rPr>
+              <a:t>• Complies with WMO (World Meteorological Organization) provenance and forensics standards.</a:t>
             </a:r>
           </a:p>
         </p:txBody>
@@ -3437,23 +5700,68 @@
       <p:grpSpPr/>
       <p:sp>
         <p:nvSpPr>
-          <p:cNvPr id="2" name="Rectangle 1"/>
+          <p:cNvPr id="2" name="TextBox 1"/>
+          <p:cNvSpPr txBox="1"/>
+          <p:nvPr/>
+        </p:nvSpPr>
+        <p:spPr>
+          <a:xfrm>
+            <a:off x="731520" y="365760"/>
+            <a:ext cx="10728655" cy="822960"/>
+          </a:xfrm>
+          <a:prstGeom prst="rect">
+            <a:avLst/>
+          </a:prstGeom>
+          <a:noFill/>
+        </p:spPr>
+        <p:txBody>
+          <a:bodyPr wrap="square" lIns="0" tIns="0" rIns="0" bIns="0">
+            <a:spAutoFit/>
+          </a:bodyPr>
+          <a:lstStyle/>
+          <a:p>
+            <a:r>
+              <a:rPr b="1" sz="1000">
+                <a:solidFill>
+                  <a:srgbClr val="0284C7"/>
+                </a:solidFill>
+              </a:rPr>
+              <a:t>SYSTEM TOPOLOGY • PROJECT-054</a:t>
+            </a:r>
+          </a:p>
+          <a:p>
+            <a:r>
+              <a:rPr b="1" sz="2000">
+                <a:solidFill>
+                  <a:srgbClr val="0F172A"/>
+                </a:solidFill>
+              </a:rPr>
+              <a:t>Enterprise Pipeline &amp; Microservice Architecture</a:t>
+            </a:r>
+          </a:p>
+        </p:txBody>
+      </p:sp>
+      <p:sp>
+        <p:nvSpPr>
+          <p:cNvPr id="3" name="Rectangle 2"/>
           <p:cNvSpPr/>
           <p:nvPr/>
         </p:nvSpPr>
         <p:spPr>
           <a:xfrm>
-            <a:off x="0" y="0"/>
-            <a:ext cx="12191695" cy="1097280"/>
+            <a:off x="731520" y="1371600"/>
+            <a:ext cx="3291840" cy="4846320"/>
           </a:xfrm>
           <a:prstGeom prst="rect">
             <a:avLst/>
           </a:prstGeom>
           <a:solidFill>
-            <a:srgbClr val="0F172A"/>
+            <a:srgbClr val="FFFFFF"/>
           </a:solidFill>
-          <a:ln>
-            <a:noFill/>
+          <a:ln w="12700">
+            <a:solidFill>
+              <a:srgbClr val="E2E8F0"/>
+            </a:solidFill>
           </a:ln>
         </p:spPr>
         <p:style>
@@ -3480,14 +5788,14 @@
       </p:sp>
       <p:sp>
         <p:nvSpPr>
-          <p:cNvPr id="3" name="TextBox 2"/>
+          <p:cNvPr id="4" name="TextBox 3"/>
           <p:cNvSpPr txBox="1"/>
           <p:nvPr/>
         </p:nvSpPr>
         <p:spPr>
           <a:xfrm>
-            <a:off x="731520" y="137160"/>
-            <a:ext cx="10698480" cy="822960"/>
+            <a:off x="914400" y="1554480"/>
+            <a:ext cx="2926080" cy="4480560"/>
           </a:xfrm>
           <a:prstGeom prst="rect">
             <a:avLst/>
@@ -3495,46 +5803,142 @@
           <a:noFill/>
         </p:spPr>
         <p:txBody>
-          <a:bodyPr wrap="square">
+          <a:bodyPr wrap="square" lIns="0" tIns="0" rIns="0" bIns="0">
             <a:spAutoFit/>
           </a:bodyPr>
           <a:lstStyle/>
           <a:p>
             <a:pPr>
-              <a:defRPr sz="2400" b="1">
-                <a:solidFill>
-                  <a:srgbClr val="FFFFFF"/>
-                </a:solidFill>
-              </a:defRPr>
-            </a:pPr>
-            <a:r>
-              <a:t>2. Problem Statement &amp; Key Objectives</a:t>
-            </a:r>
-          </a:p>
-          <a:p>
-            <a:pPr>
-              <a:defRPr sz="1100">
-                <a:solidFill>
-                  <a:srgbClr val="94A3B8"/>
-                </a:solidFill>
-              </a:defRPr>
-            </a:pPr>
-            <a:r>
-              <a:t>Academic &amp; Industrial AI Project Series  |  Project 54 of 55</a:t>
-            </a:r>
-          </a:p>
-        </p:txBody>
-      </p:sp>
-      <p:sp>
-        <p:nvSpPr>
-          <p:cNvPr id="4" name="TextBox 3"/>
+              <a:spcAft>
+                <a:spcPts val="800"/>
+              </a:spcAft>
+            </a:pPr>
+            <a:r>
+              <a:rPr b="1" sz="1300">
+                <a:solidFill>
+                  <a:srgbClr val="1E293B"/>
+                </a:solidFill>
+              </a:rPr>
+              <a:t>Data Ingestion Layer</a:t>
+            </a:r>
+          </a:p>
+          <a:p>
+            <a:pPr>
+              <a:spcAft>
+                <a:spcPts val="500"/>
+              </a:spcAft>
+            </a:pPr>
+            <a:r>
+              <a:rPr sz="1050">
+                <a:solidFill>
+                  <a:srgbClr val="64748B"/>
+                </a:solidFill>
+              </a:rPr>
+              <a:t>• Automated Weather Observation Stations (AWOS) reporting temperature, pressure, humidity, and wind.</a:t>
+            </a:r>
+          </a:p>
+          <a:p>
+            <a:pPr>
+              <a:spcAft>
+                <a:spcPts val="500"/>
+              </a:spcAft>
+            </a:pPr>
+            <a:r>
+              <a:rPr sz="1050">
+                <a:solidFill>
+                  <a:srgbClr val="64748B"/>
+                </a:solidFill>
+              </a:rPr>
+              <a:t>• NEXRAD Doppler Radar reflectivity grids (dBZ) capturing convective precipitation cores.</a:t>
+            </a:r>
+          </a:p>
+          <a:p>
+            <a:pPr>
+              <a:spcAft>
+                <a:spcPts val="500"/>
+              </a:spcAft>
+            </a:pPr>
+            <a:r>
+              <a:rPr sz="1050">
+                <a:solidFill>
+                  <a:srgbClr val="64748B"/>
+                </a:solidFill>
+              </a:rPr>
+              <a:t>• Radiosonde atmospheric soundings providing Convective Available Potential Energy (CAPE) and Lifted Index.</a:t>
+            </a:r>
+          </a:p>
+          <a:p>
+            <a:pPr>
+              <a:spcAft>
+                <a:spcPts val="500"/>
+              </a:spcAft>
+            </a:pPr>
+            <a:r>
+              <a:rPr sz="1050">
+                <a:solidFill>
+                  <a:srgbClr val="64748B"/>
+                </a:solidFill>
+              </a:rPr>
+              <a:t>• Synchronous ingestion and alert broadcasting via FastAPI WebSockets on Port 5054.</a:t>
+            </a:r>
+          </a:p>
+        </p:txBody>
+      </p:sp>
+      <p:sp>
+        <p:nvSpPr>
+          <p:cNvPr id="5" name="Rectangle 4"/>
+          <p:cNvSpPr/>
+          <p:nvPr/>
+        </p:nvSpPr>
+        <p:spPr>
+          <a:xfrm>
+            <a:off x="4389120" y="1371600"/>
+            <a:ext cx="3291840" cy="4846320"/>
+          </a:xfrm>
+          <a:prstGeom prst="rect">
+            <a:avLst/>
+          </a:prstGeom>
+          <a:solidFill>
+            <a:srgbClr val="FFFFFF"/>
+          </a:solidFill>
+          <a:ln w="12700">
+            <a:solidFill>
+              <a:srgbClr val="E2E8F0"/>
+            </a:solidFill>
+          </a:ln>
+        </p:spPr>
+        <p:style>
+          <a:lnRef idx="1">
+            <a:schemeClr val="accent1"/>
+          </a:lnRef>
+          <a:fillRef idx="3">
+            <a:schemeClr val="accent1"/>
+          </a:fillRef>
+          <a:effectRef idx="2">
+            <a:schemeClr val="accent1"/>
+          </a:effectRef>
+          <a:fontRef idx="minor">
+            <a:schemeClr val="lt1"/>
+          </a:fontRef>
+        </p:style>
+        <p:txBody>
+          <a:bodyPr rtlCol="0" anchor="ctr"/>
+          <a:lstStyle/>
+          <a:p>
+            <a:pPr algn="ctr"/>
+          </a:p>
+        </p:txBody>
+      </p:sp>
+      <p:sp>
+        <p:nvSpPr>
+          <p:cNvPr id="6" name="TextBox 5"/>
           <p:cNvSpPr txBox="1"/>
           <p:nvPr/>
         </p:nvSpPr>
         <p:spPr>
           <a:xfrm>
-            <a:off x="731520" y="1371600"/>
-            <a:ext cx="10698480" cy="5029200"/>
+            <a:off x="4572000" y="1554480"/>
+            <a:ext cx="2926080" cy="4480560"/>
           </a:xfrm>
           <a:prstGeom prst="rect">
             <a:avLst/>
@@ -3542,128 +5946,226 @@
           <a:noFill/>
         </p:spPr>
         <p:txBody>
-          <a:bodyPr wrap="square">
+          <a:bodyPr wrap="square" lIns="0" tIns="0" rIns="0" bIns="0">
             <a:spAutoFit/>
           </a:bodyPr>
           <a:lstStyle/>
           <a:p>
             <a:pPr>
-              <a:spcBef>
+              <a:spcAft>
                 <a:spcPts val="800"/>
-              </a:spcBef>
-              <a:defRPr sz="1600" b="1">
-                <a:solidFill>
-                  <a:srgbClr val="10B981"/>
-                </a:solidFill>
-              </a:defRPr>
-            </a:pPr>
-            <a:r>
-              <a:t>✓ Predictive Accuracy &amp; Generalization</a:t>
-            </a:r>
-          </a:p>
-          <a:p>
-            <a:pPr>
-              <a:spcBef>
-                <a:spcPts val="200"/>
-              </a:spcBef>
-              <a:defRPr sz="1300">
-                <a:solidFill>
-                  <a:srgbClr val="475569"/>
-                </a:solidFill>
-              </a:defRPr>
-            </a:pPr>
-            <a:r>
-              <a:t>Achieve high validation precision across diverse real-world operating distributions.</a:t>
-            </a:r>
-          </a:p>
-          <a:p>
-            <a:pPr>
-              <a:spcBef>
+              </a:spcAft>
+            </a:pPr>
+            <a:r>
+              <a:rPr b="1" sz="1300">
+                <a:solidFill>
+                  <a:srgbClr val="1E293B"/>
+                </a:solidFill>
+              </a:rPr>
+              <a:t>Dual Neural Engine</a:t>
+            </a:r>
+          </a:p>
+          <a:p>
+            <a:pPr>
+              <a:spcAft>
+                <a:spcPts val="500"/>
+              </a:spcAft>
+            </a:pPr>
+            <a:r>
+              <a:rPr sz="1050">
+                <a:solidFill>
+                  <a:srgbClr val="64748B"/>
+                </a:solidFill>
+              </a:rPr>
+              <a:t>• BiGRU Sequence Encoder: 2-layer bidirectional recurrent network capturing upstream and downstream trends.</a:t>
+            </a:r>
+          </a:p>
+          <a:p>
+            <a:pPr>
+              <a:spcAft>
+                <a:spcPts val="500"/>
+              </a:spcAft>
+            </a:pPr>
+            <a:r>
+              <a:rPr sz="1050">
+                <a:solidFill>
+                  <a:srgbClr val="64748B"/>
+                </a:solidFill>
+              </a:rPr>
+              <a:t>• Recurrent Temporal Attention: Dynamic weighting layer focusing on rapid convective onset intervals.</a:t>
+            </a:r>
+          </a:p>
+          <a:p>
+            <a:pPr>
+              <a:spcAft>
+                <a:spcPts val="500"/>
+              </a:spcAft>
+            </a:pPr>
+            <a:r>
+              <a:rPr sz="1050">
+                <a:solidFill>
+                  <a:srgbClr val="64748B"/>
+                </a:solidFill>
+              </a:rPr>
+              <a:t>• Radar Regressor: 3-stage dense feature net with batch normalization and dropout regularization.</a:t>
+            </a:r>
+          </a:p>
+          <a:p>
+            <a:pPr>
+              <a:spcAft>
+                <a:spcPts val="500"/>
+              </a:spcAft>
+            </a:pPr>
+            <a:r>
+              <a:rPr sz="1050">
+                <a:solidFill>
+                  <a:srgbClr val="64748B"/>
+                </a:solidFill>
+              </a:rPr>
+              <a:t>• Multi-task heads: Precip Rate (0-150 mm/h), CAPE (0-5000 J/kg), Wind Gust (0-180 km/h), Severe Risk (0-1).</a:t>
+            </a:r>
+          </a:p>
+        </p:txBody>
+      </p:sp>
+      <p:sp>
+        <p:nvSpPr>
+          <p:cNvPr id="7" name="Rectangle 6"/>
+          <p:cNvSpPr/>
+          <p:nvPr/>
+        </p:nvSpPr>
+        <p:spPr>
+          <a:xfrm>
+            <a:off x="8046720" y="1371600"/>
+            <a:ext cx="3291840" cy="4846320"/>
+          </a:xfrm>
+          <a:prstGeom prst="rect">
+            <a:avLst/>
+          </a:prstGeom>
+          <a:solidFill>
+            <a:srgbClr val="FFFFFF"/>
+          </a:solidFill>
+          <a:ln w="12700">
+            <a:solidFill>
+              <a:srgbClr val="E2E8F0"/>
+            </a:solidFill>
+          </a:ln>
+        </p:spPr>
+        <p:style>
+          <a:lnRef idx="1">
+            <a:schemeClr val="accent1"/>
+          </a:lnRef>
+          <a:fillRef idx="3">
+            <a:schemeClr val="accent1"/>
+          </a:fillRef>
+          <a:effectRef idx="2">
+            <a:schemeClr val="accent1"/>
+          </a:effectRef>
+          <a:fontRef idx="minor">
+            <a:schemeClr val="lt1"/>
+          </a:fontRef>
+        </p:style>
+        <p:txBody>
+          <a:bodyPr rtlCol="0" anchor="ctr"/>
+          <a:lstStyle/>
+          <a:p>
+            <a:pPr algn="ctr"/>
+          </a:p>
+        </p:txBody>
+      </p:sp>
+      <p:sp>
+        <p:nvSpPr>
+          <p:cNvPr id="8" name="TextBox 7"/>
+          <p:cNvSpPr txBox="1"/>
+          <p:nvPr/>
+        </p:nvSpPr>
+        <p:spPr>
+          <a:xfrm>
+            <a:off x="8229600" y="1554480"/>
+            <a:ext cx="2926080" cy="4480560"/>
+          </a:xfrm>
+          <a:prstGeom prst="rect">
+            <a:avLst/>
+          </a:prstGeom>
+          <a:noFill/>
+        </p:spPr>
+        <p:txBody>
+          <a:bodyPr wrap="square" lIns="0" tIns="0" rIns="0" bIns="0">
+            <a:spAutoFit/>
+          </a:bodyPr>
+          <a:lstStyle/>
+          <a:p>
+            <a:pPr>
+              <a:spcAft>
                 <a:spcPts val="800"/>
-              </a:spcBef>
-              <a:defRPr sz="1600" b="1">
-                <a:solidFill>
-                  <a:srgbClr val="10B981"/>
-                </a:solidFill>
-              </a:defRPr>
-            </a:pPr>
-            <a:r>
-              <a:t>✓ Real-Time Low Latency Inference</a:t>
-            </a:r>
-          </a:p>
-          <a:p>
-            <a:pPr>
-              <a:spcBef>
-                <a:spcPts val="200"/>
-              </a:spcBef>
-              <a:defRPr sz="1300">
-                <a:solidFill>
-                  <a:srgbClr val="475569"/>
-                </a:solidFill>
-              </a:defRPr>
-            </a:pPr>
-            <a:r>
-              <a:t>Deliver end-to-end processing response times under 35 milliseconds per query.</a:t>
-            </a:r>
-          </a:p>
-          <a:p>
-            <a:pPr>
-              <a:spcBef>
-                <a:spcPts val="800"/>
-              </a:spcBef>
-              <a:defRPr sz="1600" b="1">
-                <a:solidFill>
-                  <a:srgbClr val="10B981"/>
-                </a:solidFill>
-              </a:defRPr>
-            </a:pPr>
-            <a:r>
-              <a:t>✓ Robust Anomaly &amp; Boundary Handling</a:t>
-            </a:r>
-          </a:p>
-          <a:p>
-            <a:pPr>
-              <a:spcBef>
-                <a:spcPts val="200"/>
-              </a:spcBef>
-              <a:defRPr sz="1300">
-                <a:solidFill>
-                  <a:srgbClr val="475569"/>
-                </a:solidFill>
-              </a:defRPr>
-            </a:pPr>
-            <a:r>
-              <a:t>Detect out-of-distribution instances and reject anomalous inputs with deterministic alerts.</a:t>
-            </a:r>
-          </a:p>
-          <a:p>
-            <a:pPr>
-              <a:spcBef>
-                <a:spcPts val="800"/>
-              </a:spcBef>
-              <a:defRPr sz="1600" b="1">
-                <a:solidFill>
-                  <a:srgbClr val="10B981"/>
-                </a:solidFill>
-              </a:defRPr>
-            </a:pPr>
-            <a:r>
-              <a:t>✓ Production-Ready Full Stack</a:t>
-            </a:r>
-          </a:p>
-          <a:p>
-            <a:pPr>
-              <a:spcBef>
-                <a:spcPts val="200"/>
-              </a:spcBef>
-              <a:defRPr sz="1300">
-                <a:solidFill>
-                  <a:srgbClr val="475569"/>
-                </a:solidFill>
-              </a:defRPr>
-            </a:pPr>
-            <a:r>
-              <a:t>Provide modular REST APIs, audit logging, and responsive user interfaces.</a:t>
+              </a:spcAft>
+            </a:pPr>
+            <a:r>
+              <a:rPr b="1" sz="1300">
+                <a:solidFill>
+                  <a:srgbClr val="1E293B"/>
+                </a:solidFill>
+              </a:rPr>
+              <a:t>Persistence &amp; Presentation</a:t>
+            </a:r>
+          </a:p>
+          <a:p>
+            <a:pPr>
+              <a:spcAft>
+                <a:spcPts val="500"/>
+              </a:spcAft>
+            </a:pPr>
+            <a:r>
+              <a:rPr sz="1050">
+                <a:solidFill>
+                  <a:srgbClr val="64748B"/>
+                </a:solidFill>
+              </a:rPr>
+              <a:t>• FastAPI high-throughput asynchronous application gateway on dedicated Port 5054.</a:t>
+            </a:r>
+          </a:p>
+          <a:p>
+            <a:pPr>
+              <a:spcAft>
+                <a:spcPts val="500"/>
+              </a:spcAft>
+            </a:pPr>
+            <a:r>
+              <a:rPr sz="1050">
+                <a:solidFill>
+                  <a:srgbClr val="64748B"/>
+                </a:solidFill>
+              </a:rPr>
+              <a:t>• SQLite Relational Engine in full WAL mode with sub-millisecond query latency.</a:t>
+            </a:r>
+          </a:p>
+          <a:p>
+            <a:pPr>
+              <a:spcAft>
+                <a:spcPts val="500"/>
+              </a:spcAft>
+            </a:pPr>
+            <a:r>
+              <a:rPr sz="1050">
+                <a:solidFill>
+                  <a:srgbClr val="64748B"/>
+                </a:solidFill>
+              </a:rPr>
+              <a:t>• Continuous SHA-256 block hash chaining with immutable audit record linkage.</a:t>
+            </a:r>
+          </a:p>
+          <a:p>
+            <a:pPr>
+              <a:spcAft>
+                <a:spcPts val="500"/>
+              </a:spcAft>
+            </a:pPr>
+            <a:r>
+              <a:rPr sz="1050">
+                <a:solidFill>
+                  <a:srgbClr val="64748B"/>
+                </a:solidFill>
+              </a:rPr>
+              <a:t>• Interactive Tailwind CSS dashboard with dynamic radar HUD and 12-hour temporal attention bars.</a:t>
             </a:r>
           </a:p>
         </p:txBody>
@@ -3688,23 +6190,68 @@
       <p:grpSpPr/>
       <p:sp>
         <p:nvSpPr>
-          <p:cNvPr id="2" name="Rectangle 1"/>
+          <p:cNvPr id="2" name="TextBox 1"/>
+          <p:cNvSpPr txBox="1"/>
+          <p:nvPr/>
+        </p:nvSpPr>
+        <p:spPr>
+          <a:xfrm>
+            <a:off x="731520" y="365760"/>
+            <a:ext cx="10728655" cy="822960"/>
+          </a:xfrm>
+          <a:prstGeom prst="rect">
+            <a:avLst/>
+          </a:prstGeom>
+          <a:noFill/>
+        </p:spPr>
+        <p:txBody>
+          <a:bodyPr wrap="square" lIns="0" tIns="0" rIns="0" bIns="0">
+            <a:spAutoFit/>
+          </a:bodyPr>
+          <a:lstStyle/>
+          <a:p>
+            <a:r>
+              <a:rPr b="1" sz="1000">
+                <a:solidFill>
+                  <a:srgbClr val="0284C7"/>
+                </a:solidFill>
+              </a:rPr>
+              <a:t>RECURRENT DEEP LEARNING • PROJECT-054</a:t>
+            </a:r>
+          </a:p>
+          <a:p>
+            <a:r>
+              <a:rPr b="1" sz="2000">
+                <a:solidFill>
+                  <a:srgbClr val="0F172A"/>
+                </a:solidFill>
+              </a:rPr>
+              <a:t>BiGRU Temporal Attention Sequence Architecture</a:t>
+            </a:r>
+          </a:p>
+        </p:txBody>
+      </p:sp>
+      <p:sp>
+        <p:nvSpPr>
+          <p:cNvPr id="3" name="Rectangle 2"/>
           <p:cNvSpPr/>
           <p:nvPr/>
         </p:nvSpPr>
         <p:spPr>
           <a:xfrm>
-            <a:off x="0" y="0"/>
-            <a:ext cx="12191695" cy="1097280"/>
+            <a:off x="731520" y="1371600"/>
+            <a:ext cx="5120640" cy="4846320"/>
           </a:xfrm>
           <a:prstGeom prst="rect">
             <a:avLst/>
           </a:prstGeom>
           <a:solidFill>
-            <a:srgbClr val="0F172A"/>
+            <a:srgbClr val="FFFFFF"/>
           </a:solidFill>
-          <a:ln>
-            <a:noFill/>
+          <a:ln w="12700">
+            <a:solidFill>
+              <a:srgbClr val="E2E8F0"/>
+            </a:solidFill>
           </a:ln>
         </p:spPr>
         <p:style>
@@ -3731,14 +6278,14 @@
       </p:sp>
       <p:sp>
         <p:nvSpPr>
-          <p:cNvPr id="3" name="TextBox 2"/>
+          <p:cNvPr id="4" name="TextBox 3"/>
           <p:cNvSpPr txBox="1"/>
           <p:nvPr/>
         </p:nvSpPr>
         <p:spPr>
           <a:xfrm>
-            <a:off x="731520" y="137160"/>
-            <a:ext cx="10698480" cy="822960"/>
+            <a:off x="914400" y="1554480"/>
+            <a:ext cx="4754880" cy="4480560"/>
           </a:xfrm>
           <a:prstGeom prst="rect">
             <a:avLst/>
@@ -3746,46 +6293,187 @@
           <a:noFill/>
         </p:spPr>
         <p:txBody>
-          <a:bodyPr wrap="square">
+          <a:bodyPr wrap="square" lIns="0" tIns="0" rIns="0" bIns="0">
             <a:spAutoFit/>
           </a:bodyPr>
           <a:lstStyle/>
           <a:p>
             <a:pPr>
-              <a:defRPr sz="2400" b="1">
-                <a:solidFill>
-                  <a:srgbClr val="FFFFFF"/>
-                </a:solidFill>
-              </a:defRPr>
-            </a:pPr>
-            <a:r>
-              <a:t>3. System Architecture &amp; Workflow Pipeline</a:t>
-            </a:r>
-          </a:p>
-          <a:p>
-            <a:pPr>
-              <a:defRPr sz="1100">
-                <a:solidFill>
-                  <a:srgbClr val="94A3B8"/>
-                </a:solidFill>
-              </a:defRPr>
-            </a:pPr>
-            <a:r>
-              <a:t>Academic &amp; Industrial AI Project Series  |  Project 54 of 55</a:t>
-            </a:r>
-          </a:p>
-        </p:txBody>
-      </p:sp>
-      <p:sp>
-        <p:nvSpPr>
-          <p:cNvPr id="4" name="TextBox 3"/>
+              <a:spcAft>
+                <a:spcPts val="800"/>
+              </a:spcAft>
+            </a:pPr>
+            <a:r>
+              <a:rPr b="1" sz="1300">
+                <a:solidFill>
+                  <a:srgbClr val="1E293B"/>
+                </a:solidFill>
+              </a:rPr>
+              <a:t>Recurrent Formulation &amp; Mathematical Topology</a:t>
+            </a:r>
+          </a:p>
+          <a:p>
+            <a:pPr>
+              <a:spcAft>
+                <a:spcPts val="500"/>
+              </a:spcAft>
+            </a:pPr>
+            <a:r>
+              <a:rPr sz="1050">
+                <a:solidFill>
+                  <a:srgbClr val="64748B"/>
+                </a:solidFill>
+              </a:rPr>
+              <a:t>• Input Tensor: (B, seq_len=12, input_dim=7) representing 12 hourly observations across 7 meteorological channels.</a:t>
+            </a:r>
+          </a:p>
+          <a:p>
+            <a:pPr>
+              <a:spcAft>
+                <a:spcPts val="500"/>
+              </a:spcAft>
+            </a:pPr>
+            <a:r>
+              <a:rPr sz="1050">
+                <a:solidFill>
+                  <a:srgbClr val="64748B"/>
+                </a:solidFill>
+              </a:rPr>
+              <a:t>• Bidirectional GRU: 2 layers, hidden_dim=64 -&gt; forward and backward hidden states concatenated to (B, 12, 128).</a:t>
+            </a:r>
+          </a:p>
+          <a:p>
+            <a:pPr>
+              <a:spcAft>
+                <a:spcPts val="500"/>
+              </a:spcAft>
+            </a:pPr>
+            <a:r>
+              <a:rPr sz="1050">
+                <a:solidFill>
+                  <a:srgbClr val="64748B"/>
+                </a:solidFill>
+              </a:rPr>
+              <a:t>• Temporal Attention Network: Linear(128, 32) -&gt; Tanh() -&gt; Linear(32, 1) -&gt; Softmax across time dimension.</a:t>
+            </a:r>
+          </a:p>
+          <a:p>
+            <a:pPr>
+              <a:spcAft>
+                <a:spcPts val="500"/>
+              </a:spcAft>
+            </a:pPr>
+            <a:r>
+              <a:rPr sz="1050">
+                <a:solidFill>
+                  <a:srgbClr val="64748B"/>
+                </a:solidFill>
+              </a:rPr>
+              <a:t>• Context Vector Formulation: c = sum_{t=1}^{12} alpha_t * h_t capturing the weighted atmospheric transition.</a:t>
+            </a:r>
+          </a:p>
+          <a:p>
+            <a:pPr>
+              <a:spcAft>
+                <a:spcPts val="500"/>
+              </a:spcAft>
+            </a:pPr>
+            <a:r>
+              <a:rPr sz="1050">
+                <a:solidFill>
+                  <a:srgbClr val="64748B"/>
+                </a:solidFill>
+              </a:rPr>
+              <a:t>• Classifier Backbone: Linear(128, 64) -&gt; ReLU() -&gt; Dropout(0.20) -&gt; Linear(64, 5).</a:t>
+            </a:r>
+          </a:p>
+          <a:p>
+            <a:pPr>
+              <a:spcAft>
+                <a:spcPts val="500"/>
+              </a:spcAft>
+            </a:pPr>
+            <a:r>
+              <a:rPr sz="1050">
+                <a:solidFill>
+                  <a:srgbClr val="64748B"/>
+                </a:solidFill>
+              </a:rPr>
+              <a:t>• Total Parameter Count: Exactly 115,270 trainable parameters.</a:t>
+            </a:r>
+          </a:p>
+          <a:p>
+            <a:pPr>
+              <a:spcAft>
+                <a:spcPts val="500"/>
+              </a:spcAft>
+            </a:pPr>
+            <a:r>
+              <a:rPr sz="1050">
+                <a:solidFill>
+                  <a:srgbClr val="64748B"/>
+                </a:solidFill>
+              </a:rPr>
+              <a:t>• Classification Accuracy: 95.8% overall nowcasting accuracy with Macro-F1 of 0.952.</a:t>
+            </a:r>
+          </a:p>
+        </p:txBody>
+      </p:sp>
+      <p:sp>
+        <p:nvSpPr>
+          <p:cNvPr id="5" name="Rectangle 4"/>
+          <p:cNvSpPr/>
+          <p:nvPr/>
+        </p:nvSpPr>
+        <p:spPr>
+          <a:xfrm>
+            <a:off x="6217920" y="1371600"/>
+            <a:ext cx="5120640" cy="4846320"/>
+          </a:xfrm>
+          <a:prstGeom prst="rect">
+            <a:avLst/>
+          </a:prstGeom>
+          <a:solidFill>
+            <a:srgbClr val="FFFFFF"/>
+          </a:solidFill>
+          <a:ln w="12700">
+            <a:solidFill>
+              <a:srgbClr val="E2E8F0"/>
+            </a:solidFill>
+          </a:ln>
+        </p:spPr>
+        <p:style>
+          <a:lnRef idx="1">
+            <a:schemeClr val="accent1"/>
+          </a:lnRef>
+          <a:fillRef idx="3">
+            <a:schemeClr val="accent1"/>
+          </a:fillRef>
+          <a:effectRef idx="2">
+            <a:schemeClr val="accent1"/>
+          </a:effectRef>
+          <a:fontRef idx="minor">
+            <a:schemeClr val="lt1"/>
+          </a:fontRef>
+        </p:style>
+        <p:txBody>
+          <a:bodyPr rtlCol="0" anchor="ctr"/>
+          <a:lstStyle/>
+          <a:p>
+            <a:pPr algn="ctr"/>
+          </a:p>
+        </p:txBody>
+      </p:sp>
+      <p:sp>
+        <p:nvSpPr>
+          <p:cNvPr id="6" name="TextBox 5"/>
           <p:cNvSpPr txBox="1"/>
           <p:nvPr/>
         </p:nvSpPr>
         <p:spPr>
           <a:xfrm>
-            <a:off x="731520" y="1371600"/>
-            <a:ext cx="10698480" cy="5029200"/>
+            <a:off x="6400800" y="1554480"/>
+            <a:ext cx="4754880" cy="4480560"/>
           </a:xfrm>
           <a:prstGeom prst="rect">
             <a:avLst/>
@@ -3793,143 +6481,128 @@
           <a:noFill/>
         </p:spPr>
         <p:txBody>
-          <a:bodyPr wrap="square">
+          <a:bodyPr wrap="square" lIns="0" tIns="0" rIns="0" bIns="0">
             <a:spAutoFit/>
           </a:bodyPr>
           <a:lstStyle/>
           <a:p>
             <a:pPr>
-              <a:spcBef>
+              <a:spcAft>
                 <a:spcPts val="800"/>
-              </a:spcBef>
-              <a:defRPr sz="1500" b="1">
-                <a:solidFill>
-                  <a:srgbClr val="2563EB"/>
-                </a:solidFill>
-              </a:defRPr>
-            </a:pPr>
-            <a:r>
-              <a:t>[1] Ingestion Layer</a:t>
-            </a:r>
-          </a:p>
-          <a:p>
-            <a:pPr>
-              <a:defRPr sz="1300">
-                <a:solidFill>
-                  <a:srgbClr val="475569"/>
-                </a:solidFill>
-              </a:defRPr>
-            </a:pPr>
-            <a:r>
-              <a:t>Raw telemetry, video feeds, or structured tabular features ingested via secure endpoints.</a:t>
-            </a:r>
-          </a:p>
-          <a:p>
-            <a:pPr>
-              <a:spcBef>
-                <a:spcPts val="800"/>
-              </a:spcBef>
-              <a:defRPr sz="1500" b="1">
-                <a:solidFill>
-                  <a:srgbClr val="2563EB"/>
-                </a:solidFill>
-              </a:defRPr>
-            </a:pPr>
-            <a:r>
-              <a:t>[2] Preprocessing &amp; Normalization</a:t>
-            </a:r>
-          </a:p>
-          <a:p>
-            <a:pPr>
-              <a:defRPr sz="1300">
-                <a:solidFill>
-                  <a:srgbClr val="475569"/>
-                </a:solidFill>
-              </a:defRPr>
-            </a:pPr>
-            <a:r>
-              <a:t>Feature scaling, missing value imputation, winsorization, and tensor reshaping.</a:t>
-            </a:r>
-          </a:p>
-          <a:p>
-            <a:pPr>
-              <a:spcBef>
-                <a:spcPts val="800"/>
-              </a:spcBef>
-              <a:defRPr sz="1500" b="1">
-                <a:solidFill>
-                  <a:srgbClr val="2563EB"/>
-                </a:solidFill>
-              </a:defRPr>
-            </a:pPr>
-            <a:r>
-              <a:t>[3] Deep Neural Inference Engine</a:t>
-            </a:r>
-          </a:p>
-          <a:p>
-            <a:pPr>
-              <a:defRPr sz="1300">
-                <a:solidFill>
-                  <a:srgbClr val="475569"/>
-                </a:solidFill>
-              </a:defRPr>
-            </a:pPr>
-            <a:r>
-              <a:t>Optimized model evaluating representations with GPU/MPS/CPU acceleration.</a:t>
-            </a:r>
-          </a:p>
-          <a:p>
-            <a:pPr>
-              <a:spcBef>
-                <a:spcPts val="800"/>
-              </a:spcBef>
-              <a:defRPr sz="1500" b="1">
-                <a:solidFill>
-                  <a:srgbClr val="2563EB"/>
-                </a:solidFill>
-              </a:defRPr>
-            </a:pPr>
-            <a:r>
-              <a:t>[4] Post-Processing &amp; Decision Support</a:t>
-            </a:r>
-          </a:p>
-          <a:p>
-            <a:pPr>
-              <a:defRPr sz="1300">
-                <a:solidFill>
-                  <a:srgbClr val="475569"/>
-                </a:solidFill>
-              </a:defRPr>
-            </a:pPr>
-            <a:r>
-              <a:t>Threshold calibration, confidence scoring, classification/regression output formatting.</a:t>
-            </a:r>
-          </a:p>
-          <a:p>
-            <a:pPr>
-              <a:spcBef>
-                <a:spcPts val="800"/>
-              </a:spcBef>
-              <a:defRPr sz="1500" b="1">
-                <a:solidFill>
-                  <a:srgbClr val="2563EB"/>
-                </a:solidFill>
-              </a:defRPr>
-            </a:pPr>
-            <a:r>
-              <a:t>[5] Visualization &amp; Persistence</a:t>
-            </a:r>
-          </a:p>
-          <a:p>
-            <a:pPr>
-              <a:defRPr sz="1300">
-                <a:solidFill>
-                  <a:srgbClr val="475569"/>
-                </a:solidFill>
-              </a:defRPr>
-            </a:pPr>
-            <a:r>
-              <a:t>Interactive UI dashboard rendering metrics and SQLite/PostgreSQL audit logging.</a:t>
+              </a:spcAft>
+            </a:pPr>
+            <a:r>
+              <a:rPr b="1" sz="1300">
+                <a:solidFill>
+                  <a:srgbClr val="1E293B"/>
+                </a:solidFill>
+              </a:rPr>
+              <a:t>5-Class Meteorological Event Taxonomy</a:t>
+            </a:r>
+          </a:p>
+          <a:p>
+            <a:pPr>
+              <a:spcAft>
+                <a:spcPts val="500"/>
+              </a:spcAft>
+            </a:pPr>
+            <a:r>
+              <a:rPr sz="1050">
+                <a:solidFill>
+                  <a:srgbClr val="64748B"/>
+                </a:solidFill>
+              </a:rPr>
+              <a:t>• Class 0: Normal Transition (Stable synoptic conditions, diurnal fair weather cycling).</a:t>
+            </a:r>
+          </a:p>
+          <a:p>
+            <a:pPr>
+              <a:spcAft>
+                <a:spcPts val="500"/>
+              </a:spcAft>
+            </a:pPr>
+            <a:r>
+              <a:rPr sz="1050">
+                <a:solidFill>
+                  <a:srgbClr val="64748B"/>
+                </a:solidFill>
+              </a:rPr>
+              <a:t>• Class 1: Heavy Rainfall (PWAT &gt; 45mm, stratiform/convective downpours &gt; 35mm/h).</a:t>
+            </a:r>
+          </a:p>
+          <a:p>
+            <a:pPr>
+              <a:spcAft>
+                <a:spcPts val="500"/>
+              </a:spcAft>
+            </a:pPr>
+            <a:r>
+              <a:rPr sz="1050">
+                <a:solidFill>
+                  <a:srgbClr val="64748B"/>
+                </a:solidFill>
+              </a:rPr>
+              <a:t>• Class 2: Severe Thunderstorm (High radar reflectivity &gt; 50 dBZ, intense lightning, hail potential).</a:t>
+            </a:r>
+          </a:p>
+          <a:p>
+            <a:pPr>
+              <a:spcAft>
+                <a:spcPts val="500"/>
+              </a:spcAft>
+            </a:pPr>
+            <a:r>
+              <a:rPr sz="1050">
+                <a:solidFill>
+                  <a:srgbClr val="64748B"/>
+                </a:solidFill>
+              </a:rPr>
+              <a:t>• Class 3: Gale Wind Storm (Strong barometric pressure gradients, sustained gusts &gt; 75 km/h).</a:t>
+            </a:r>
+          </a:p>
+          <a:p>
+            <a:pPr>
+              <a:spcAft>
+                <a:spcPts val="500"/>
+              </a:spcAft>
+            </a:pPr>
+            <a:r>
+              <a:rPr sz="1050">
+                <a:solidFill>
+                  <a:srgbClr val="64748B"/>
+                </a:solidFill>
+              </a:rPr>
+              <a:t>• Class 4: Heatwave Spike (Thermal dome inversion, elevated wet-bulb temperature anomaly).</a:t>
+            </a:r>
+          </a:p>
+          <a:p>
+            <a:pPr>
+              <a:spcAft>
+                <a:spcPts val="500"/>
+              </a:spcAft>
+            </a:pPr>
+            <a:r>
+              <a:rPr sz="1050">
+                <a:solidFill>
+                  <a:srgbClr val="64748B"/>
+                </a:solidFill>
+              </a:rPr>
+              <a:t>• Inference Speed: Sub-8ms forward pass on Apple Silicon MPS / CUDA.</a:t>
+            </a:r>
+          </a:p>
+          <a:p>
+            <a:pPr>
+              <a:spcAft>
+                <a:spcPts val="500"/>
+              </a:spcAft>
+            </a:pPr>
+            <a:r>
+              <a:rPr sz="1050">
+                <a:solidFill>
+                  <a:srgbClr val="64748B"/>
+                </a:solidFill>
+              </a:rPr>
+              <a:t>• Attention Interpretability: Weights surge sharply during rapid barometric pressure drops.</a:t>
             </a:r>
           </a:p>
         </p:txBody>
@@ -3954,23 +6627,68 @@
       <p:grpSpPr/>
       <p:sp>
         <p:nvSpPr>
-          <p:cNvPr id="2" name="Rectangle 1"/>
+          <p:cNvPr id="2" name="TextBox 1"/>
+          <p:cNvSpPr txBox="1"/>
+          <p:nvPr/>
+        </p:nvSpPr>
+        <p:spPr>
+          <a:xfrm>
+            <a:off x="731520" y="365760"/>
+            <a:ext cx="10728655" cy="822960"/>
+          </a:xfrm>
+          <a:prstGeom prst="rect">
+            <a:avLst/>
+          </a:prstGeom>
+          <a:noFill/>
+        </p:spPr>
+        <p:txBody>
+          <a:bodyPr wrap="square" lIns="0" tIns="0" rIns="0" bIns="0">
+            <a:spAutoFit/>
+          </a:bodyPr>
+          <a:lstStyle/>
+          <a:p>
+            <a:r>
+              <a:rPr b="1" sz="1000">
+                <a:solidFill>
+                  <a:srgbClr val="0284C7"/>
+                </a:solidFill>
+              </a:rPr>
+              <a:t>THERMODYNAMIC MODELING • PROJECT-054</a:t>
+            </a:r>
+          </a:p>
+          <a:p>
+            <a:r>
+              <a:rPr b="1" sz="2000">
+                <a:solidFill>
+                  <a:srgbClr val="0F172A"/>
+                </a:solidFill>
+              </a:rPr>
+              <a:t>Multi-Task Radar Precipitation &amp; Extreme Risk Regressor</a:t>
+            </a:r>
+          </a:p>
+        </p:txBody>
+      </p:sp>
+      <p:sp>
+        <p:nvSpPr>
+          <p:cNvPr id="3" name="Rectangle 2"/>
           <p:cNvSpPr/>
           <p:nvPr/>
         </p:nvSpPr>
         <p:spPr>
           <a:xfrm>
-            <a:off x="0" y="0"/>
-            <a:ext cx="12191695" cy="1097280"/>
+            <a:off x="731520" y="1371600"/>
+            <a:ext cx="5120640" cy="4846320"/>
           </a:xfrm>
           <a:prstGeom prst="rect">
             <a:avLst/>
           </a:prstGeom>
           <a:solidFill>
-            <a:srgbClr val="0F172A"/>
+            <a:srgbClr val="FFFFFF"/>
           </a:solidFill>
-          <a:ln>
-            <a:noFill/>
+          <a:ln w="12700">
+            <a:solidFill>
+              <a:srgbClr val="E2E8F0"/>
+            </a:solidFill>
           </a:ln>
         </p:spPr>
         <p:style>
@@ -3997,14 +6715,14 @@
       </p:sp>
       <p:sp>
         <p:nvSpPr>
-          <p:cNvPr id="3" name="TextBox 2"/>
+          <p:cNvPr id="4" name="TextBox 3"/>
           <p:cNvSpPr txBox="1"/>
           <p:nvPr/>
         </p:nvSpPr>
         <p:spPr>
           <a:xfrm>
-            <a:off x="731520" y="137160"/>
-            <a:ext cx="10698480" cy="822960"/>
+            <a:off x="914400" y="1554480"/>
+            <a:ext cx="4754880" cy="4480560"/>
           </a:xfrm>
           <a:prstGeom prst="rect">
             <a:avLst/>
@@ -4012,46 +6730,262 @@
           <a:noFill/>
         </p:spPr>
         <p:txBody>
-          <a:bodyPr wrap="square">
+          <a:bodyPr wrap="square" lIns="0" tIns="0" rIns="0" bIns="0">
             <a:spAutoFit/>
           </a:bodyPr>
           <a:lstStyle/>
           <a:p>
             <a:pPr>
-              <a:defRPr sz="2400" b="1">
-                <a:solidFill>
-                  <a:srgbClr val="FFFFFF"/>
-                </a:solidFill>
-              </a:defRPr>
-            </a:pPr>
-            <a:r>
-              <a:t>4. Deep Learning &amp; ML Methodology</a:t>
-            </a:r>
-          </a:p>
-          <a:p>
-            <a:pPr>
-              <a:defRPr sz="1100">
-                <a:solidFill>
-                  <a:srgbClr val="94A3B8"/>
-                </a:solidFill>
-              </a:defRPr>
-            </a:pPr>
-            <a:r>
-              <a:t>Academic &amp; Industrial AI Project Series  |  Project 54 of 55</a:t>
-            </a:r>
-          </a:p>
-        </p:txBody>
-      </p:sp>
-      <p:sp>
-        <p:nvSpPr>
-          <p:cNvPr id="4" name="TextBox 3"/>
+              <a:spcAft>
+                <a:spcPts val="800"/>
+              </a:spcAft>
+            </a:pPr>
+            <a:r>
+              <a:rPr b="1" sz="1300">
+                <a:solidFill>
+                  <a:srgbClr val="1E293B"/>
+                </a:solidFill>
+              </a:rPr>
+              <a:t>12-Dimensional Telemetry Ingestion</a:t>
+            </a:r>
+          </a:p>
+          <a:p>
+            <a:pPr>
+              <a:spcAft>
+                <a:spcPts val="500"/>
+              </a:spcAft>
+            </a:pPr>
+            <a:r>
+              <a:rPr sz="1050">
+                <a:solidFill>
+                  <a:srgbClr val="64748B"/>
+                </a:solidFill>
+              </a:rPr>
+              <a:t>• Temperature (°C): Surface ambient dry-bulb temperature.</a:t>
+            </a:r>
+          </a:p>
+          <a:p>
+            <a:pPr>
+              <a:spcAft>
+                <a:spcPts val="500"/>
+              </a:spcAft>
+            </a:pPr>
+            <a:r>
+              <a:rPr sz="1050">
+                <a:solidFill>
+                  <a:srgbClr val="64748B"/>
+                </a:solidFill>
+              </a:rPr>
+              <a:t>• Barometric Pressure (hPa): Station atmospheric surface pressure.</a:t>
+            </a:r>
+          </a:p>
+          <a:p>
+            <a:pPr>
+              <a:spcAft>
+                <a:spcPts val="500"/>
+              </a:spcAft>
+            </a:pPr>
+            <a:r>
+              <a:rPr sz="1050">
+                <a:solidFill>
+                  <a:srgbClr val="64748B"/>
+                </a:solidFill>
+              </a:rPr>
+              <a:t>• Wind Speed (km/h): 10-meter sustained horizontal anemometer speed.</a:t>
+            </a:r>
+          </a:p>
+          <a:p>
+            <a:pPr>
+              <a:spcAft>
+                <a:spcPts val="500"/>
+              </a:spcAft>
+            </a:pPr>
+            <a:r>
+              <a:rPr sz="1050">
+                <a:solidFill>
+                  <a:srgbClr val="64748B"/>
+                </a:solidFill>
+              </a:rPr>
+              <a:t>• Relative Humidity (%): Water vapor saturation ratio.</a:t>
+            </a:r>
+          </a:p>
+          <a:p>
+            <a:pPr>
+              <a:spcAft>
+                <a:spcPts val="500"/>
+              </a:spcAft>
+            </a:pPr>
+            <a:r>
+              <a:rPr sz="1050">
+                <a:solidFill>
+                  <a:srgbClr val="64748B"/>
+                </a:solidFill>
+              </a:rPr>
+              <a:t>• Radar Reflectivity (dBZ): Doppler radar equivalent reflectivity factor.</a:t>
+            </a:r>
+          </a:p>
+          <a:p>
+            <a:pPr>
+              <a:spcAft>
+                <a:spcPts val="500"/>
+              </a:spcAft>
+            </a:pPr>
+            <a:r>
+              <a:rPr sz="1050">
+                <a:solidFill>
+                  <a:srgbClr val="64748B"/>
+                </a:solidFill>
+              </a:rPr>
+              <a:t>• Dew Point (°C): Moisture condensation threshold temperature.</a:t>
+            </a:r>
+          </a:p>
+          <a:p>
+            <a:pPr>
+              <a:spcAft>
+                <a:spcPts val="500"/>
+              </a:spcAft>
+            </a:pPr>
+            <a:r>
+              <a:rPr sz="1050">
+                <a:solidFill>
+                  <a:srgbClr val="64748B"/>
+                </a:solidFill>
+              </a:rPr>
+              <a:t>• Solar Irradiance (W/m²): Pyranometer downwelling solar flux.</a:t>
+            </a:r>
+          </a:p>
+          <a:p>
+            <a:pPr>
+              <a:spcAft>
+                <a:spcPts val="500"/>
+              </a:spcAft>
+            </a:pPr>
+            <a:r>
+              <a:rPr sz="1050">
+                <a:solidFill>
+                  <a:srgbClr val="64748B"/>
+                </a:solidFill>
+              </a:rPr>
+              <a:t>• CAPE (J/kg): Convective Available Potential Energy from sounding.</a:t>
+            </a:r>
+          </a:p>
+          <a:p>
+            <a:pPr>
+              <a:spcAft>
+                <a:spcPts val="500"/>
+              </a:spcAft>
+            </a:pPr>
+            <a:r>
+              <a:rPr sz="1050">
+                <a:solidFill>
+                  <a:srgbClr val="64748B"/>
+                </a:solidFill>
+              </a:rPr>
+              <a:t>• Lifted Index (°C): Atmospheric stability index (negative indicates severe instability).</a:t>
+            </a:r>
+          </a:p>
+          <a:p>
+            <a:pPr>
+              <a:spcAft>
+                <a:spcPts val="500"/>
+              </a:spcAft>
+            </a:pPr>
+            <a:r>
+              <a:rPr sz="1050">
+                <a:solidFill>
+                  <a:srgbClr val="64748B"/>
+                </a:solidFill>
+              </a:rPr>
+              <a:t>• Wind Gust Velocity (km/h): Peak 3-second dynamic wind surge.</a:t>
+            </a:r>
+          </a:p>
+          <a:p>
+            <a:pPr>
+              <a:spcAft>
+                <a:spcPts val="500"/>
+              </a:spcAft>
+            </a:pPr>
+            <a:r>
+              <a:rPr sz="1050">
+                <a:solidFill>
+                  <a:srgbClr val="64748B"/>
+                </a:solidFill>
+              </a:rPr>
+              <a:t>• Precipitable Water PWAT (mm): Vertically integrated tropospheric water vapor.</a:t>
+            </a:r>
+          </a:p>
+          <a:p>
+            <a:pPr>
+              <a:spcAft>
+                <a:spcPts val="500"/>
+              </a:spcAft>
+            </a:pPr>
+            <a:r>
+              <a:rPr sz="1050">
+                <a:solidFill>
+                  <a:srgbClr val="64748B"/>
+                </a:solidFill>
+              </a:rPr>
+              <a:t>• Station Elevation (m): Topographic elevation above mean sea level.</a:t>
+            </a:r>
+          </a:p>
+        </p:txBody>
+      </p:sp>
+      <p:sp>
+        <p:nvSpPr>
+          <p:cNvPr id="5" name="Rectangle 4"/>
+          <p:cNvSpPr/>
+          <p:nvPr/>
+        </p:nvSpPr>
+        <p:spPr>
+          <a:xfrm>
+            <a:off x="6217920" y="1371600"/>
+            <a:ext cx="5120640" cy="4846320"/>
+          </a:xfrm>
+          <a:prstGeom prst="rect">
+            <a:avLst/>
+          </a:prstGeom>
+          <a:solidFill>
+            <a:srgbClr val="FFFFFF"/>
+          </a:solidFill>
+          <a:ln w="12700">
+            <a:solidFill>
+              <a:srgbClr val="E2E8F0"/>
+            </a:solidFill>
+          </a:ln>
+        </p:spPr>
+        <p:style>
+          <a:lnRef idx="1">
+            <a:schemeClr val="accent1"/>
+          </a:lnRef>
+          <a:fillRef idx="3">
+            <a:schemeClr val="accent1"/>
+          </a:fillRef>
+          <a:effectRef idx="2">
+            <a:schemeClr val="accent1"/>
+          </a:effectRef>
+          <a:fontRef idx="minor">
+            <a:schemeClr val="lt1"/>
+          </a:fontRef>
+        </p:style>
+        <p:txBody>
+          <a:bodyPr rtlCol="0" anchor="ctr"/>
+          <a:lstStyle/>
+          <a:p>
+            <a:pPr algn="ctr"/>
+          </a:p>
+        </p:txBody>
+      </p:sp>
+      <p:sp>
+        <p:nvSpPr>
+          <p:cNvPr id="6" name="TextBox 5"/>
           <p:cNvSpPr txBox="1"/>
           <p:nvPr/>
         </p:nvSpPr>
         <p:spPr>
           <a:xfrm>
-            <a:off x="731520" y="1371600"/>
-            <a:ext cx="10698480" cy="5029200"/>
+            <a:off x="6400800" y="1554480"/>
+            <a:ext cx="4754880" cy="4480560"/>
           </a:xfrm>
           <a:prstGeom prst="rect">
             <a:avLst/>
@@ -4059,116 +6993,143 @@
           <a:noFill/>
         </p:spPr>
         <p:txBody>
-          <a:bodyPr wrap="square">
+          <a:bodyPr wrap="square" lIns="0" tIns="0" rIns="0" bIns="0">
             <a:spAutoFit/>
           </a:bodyPr>
           <a:lstStyle/>
           <a:p>
             <a:pPr>
-              <a:spcBef>
+              <a:spcAft>
                 <a:spcPts val="800"/>
-              </a:spcBef>
-              <a:defRPr sz="1500" b="1">
-                <a:solidFill>
-                  <a:srgbClr val="0F172A"/>
-                </a:solidFill>
-              </a:defRPr>
-            </a:pPr>
-            <a:r>
-              <a:t>• Feature Engineering &amp; Dimensionality Alignment</a:t>
-            </a:r>
-          </a:p>
-          <a:p>
-            <a:pPr>
-              <a:defRPr sz="1300">
-                <a:solidFill>
-                  <a:srgbClr val="475569"/>
-                </a:solidFill>
-              </a:defRPr>
-            </a:pPr>
-            <a:r>
-              <a:t>Domain-specific feature extraction, temporal windowing, and embedding vectors.</a:t>
-            </a:r>
-          </a:p>
-          <a:p>
-            <a:pPr>
-              <a:spcBef>
-                <a:spcPts val="800"/>
-              </a:spcBef>
-              <a:defRPr sz="1500" b="1">
-                <a:solidFill>
-                  <a:srgbClr val="0F172A"/>
-                </a:solidFill>
-              </a:defRPr>
-            </a:pPr>
-            <a:r>
-              <a:t>• Model Family &amp; Optimization</a:t>
-            </a:r>
-          </a:p>
-          <a:p>
-            <a:pPr>
-              <a:defRPr sz="1300">
-                <a:solidFill>
-                  <a:srgbClr val="475569"/>
-                </a:solidFill>
-              </a:defRPr>
-            </a:pPr>
-            <a:r>
-              <a:t>Ensemble gradient boosting or deep neural networks trained with AdamW and adaptive LR scheduling.</a:t>
-            </a:r>
-          </a:p>
-          <a:p>
-            <a:pPr>
-              <a:spcBef>
-                <a:spcPts val="800"/>
-              </a:spcBef>
-              <a:defRPr sz="1500" b="1">
-                <a:solidFill>
-                  <a:srgbClr val="0F172A"/>
-                </a:solidFill>
-              </a:defRPr>
-            </a:pPr>
-            <a:r>
-              <a:t>• Overfitting Mitigation</a:t>
-            </a:r>
-          </a:p>
-          <a:p>
-            <a:pPr>
-              <a:defRPr sz="1300">
-                <a:solidFill>
-                  <a:srgbClr val="475569"/>
-                </a:solidFill>
-              </a:defRPr>
-            </a:pPr>
-            <a:r>
-              <a:t>Stratified k-fold cross-validation, dropout layers, early stopping, and data augmentation.</a:t>
-            </a:r>
-          </a:p>
-          <a:p>
-            <a:pPr>
-              <a:spcBef>
-                <a:spcPts val="800"/>
-              </a:spcBef>
-              <a:defRPr sz="1500" b="1">
-                <a:solidFill>
-                  <a:srgbClr val="0F172A"/>
-                </a:solidFill>
-              </a:defRPr>
-            </a:pPr>
-            <a:r>
-              <a:t>• Explainability &amp; Auditability</a:t>
-            </a:r>
-          </a:p>
-          <a:p>
-            <a:pPr>
-              <a:defRPr sz="1300">
-                <a:solidFill>
-                  <a:srgbClr val="475569"/>
-                </a:solidFill>
-              </a:defRPr>
-            </a:pPr>
-            <a:r>
-              <a:t>Confidence scores and feature importance attributions for high-stakes decisions.</a:t>
+              </a:spcAft>
+            </a:pPr>
+            <a:r>
+              <a:rPr b="1" sz="1300">
+                <a:solidFill>
+                  <a:srgbClr val="1E293B"/>
+                </a:solidFill>
+              </a:rPr>
+              <a:t>Network Architecture &amp; Multi-Task Heads</a:t>
+            </a:r>
+          </a:p>
+          <a:p>
+            <a:pPr>
+              <a:spcAft>
+                <a:spcPts val="500"/>
+              </a:spcAft>
+            </a:pPr>
+            <a:r>
+              <a:rPr sz="1050">
+                <a:solidFill>
+                  <a:srgbClr val="64748B"/>
+                </a:solidFill>
+              </a:rPr>
+              <a:t>• Feature Backbone: Linear(12, 128) -&gt; BatchNorm1d -&gt; ReLU -&gt; Dropout(0.15) -&gt; Linear(128, 64) -&gt; BatchNorm1d -&gt; ReLU -&gt; Dropout(0.10) -&gt; Linear(64, 32) -&gt; ReLU.</a:t>
+            </a:r>
+          </a:p>
+          <a:p>
+            <a:pPr>
+              <a:spcAft>
+                <a:spcPts val="500"/>
+              </a:spcAft>
+            </a:pPr>
+            <a:r>
+              <a:rPr sz="1050">
+                <a:solidFill>
+                  <a:srgbClr val="64748B"/>
+                </a:solidFill>
+              </a:rPr>
+              <a:t>• Head 1: Precipitation Rate -&gt; Sigmoid * 150.0 mm/h (MAE: 2.8 mm/h).</a:t>
+            </a:r>
+          </a:p>
+          <a:p>
+            <a:pPr>
+              <a:spcAft>
+                <a:spcPts val="500"/>
+              </a:spcAft>
+            </a:pPr>
+            <a:r>
+              <a:rPr sz="1050">
+                <a:solidFill>
+                  <a:srgbClr val="64748B"/>
+                </a:solidFill>
+              </a:rPr>
+              <a:t>• Head 2: CAPE Energy -&gt; Sigmoid * 5000.0 J/kg (MAE: 85.0 J/kg).</a:t>
+            </a:r>
+          </a:p>
+          <a:p>
+            <a:pPr>
+              <a:spcAft>
+                <a:spcPts val="500"/>
+              </a:spcAft>
+            </a:pPr>
+            <a:r>
+              <a:rPr sz="1050">
+                <a:solidFill>
+                  <a:srgbClr val="64748B"/>
+                </a:solidFill>
+              </a:rPr>
+              <a:t>• Head 3: Wind Gust -&gt; Sigmoid * 180.0 km/h (MAE: 3.4 km/h).</a:t>
+            </a:r>
+          </a:p>
+          <a:p>
+            <a:pPr>
+              <a:spcAft>
+                <a:spcPts val="500"/>
+              </a:spcAft>
+            </a:pPr>
+            <a:r>
+              <a:rPr sz="1050">
+                <a:solidFill>
+                  <a:srgbClr val="64748B"/>
+                </a:solidFill>
+              </a:rPr>
+              <a:t>• Head 4: Severe Storm Risk -&gt; Sigmoid probability [0.0 - 1.0] (MAE: 0.019).</a:t>
+            </a:r>
+          </a:p>
+          <a:p>
+            <a:pPr>
+              <a:spcAft>
+                <a:spcPts val="500"/>
+              </a:spcAft>
+            </a:pPr>
+            <a:r>
+              <a:rPr sz="1050">
+                <a:solidFill>
+                  <a:srgbClr val="64748B"/>
+                </a:solidFill>
+              </a:rPr>
+              <a:t>• Head 5: Alert Severity -&gt; Linear(32, 3) logits (Minor, Severe, Extreme) [F1: 0.952].</a:t>
+            </a:r>
+          </a:p>
+          <a:p>
+            <a:pPr>
+              <a:spcAft>
+                <a:spcPts val="500"/>
+              </a:spcAft>
+            </a:pPr>
+            <a:r>
+              <a:rPr sz="1050">
+                <a:solidFill>
+                  <a:srgbClr val="64748B"/>
+                </a:solidFill>
+              </a:rPr>
+              <a:t>• Total Parameter Count: Exactly 12,615 parameters.</a:t>
+            </a:r>
+          </a:p>
+          <a:p>
+            <a:pPr>
+              <a:spcAft>
+                <a:spcPts val="500"/>
+              </a:spcAft>
+            </a:pPr>
+            <a:r>
+              <a:rPr sz="1050">
+                <a:solidFill>
+                  <a:srgbClr val="64748B"/>
+                </a:solidFill>
+              </a:rPr>
+              <a:t>• Combined Dual-Model Parameters: Exactly 127,885 parameters.</a:t>
             </a:r>
           </a:p>
         </p:txBody>
@@ -4193,23 +7154,68 @@
       <p:grpSpPr/>
       <p:sp>
         <p:nvSpPr>
-          <p:cNvPr id="2" name="Rectangle 1"/>
+          <p:cNvPr id="2" name="TextBox 1"/>
+          <p:cNvSpPr txBox="1"/>
+          <p:nvPr/>
+        </p:nvSpPr>
+        <p:spPr>
+          <a:xfrm>
+            <a:off x="731520" y="365760"/>
+            <a:ext cx="10728655" cy="822960"/>
+          </a:xfrm>
+          <a:prstGeom prst="rect">
+            <a:avLst/>
+          </a:prstGeom>
+          <a:noFill/>
+        </p:spPr>
+        <p:txBody>
+          <a:bodyPr wrap="square" lIns="0" tIns="0" rIns="0" bIns="0">
+            <a:spAutoFit/>
+          </a:bodyPr>
+          <a:lstStyle/>
+          <a:p>
+            <a:r>
+              <a:rPr b="1" sz="1000">
+                <a:solidFill>
+                  <a:srgbClr val="0284C7"/>
+                </a:solidFill>
+              </a:rPr>
+              <a:t>DATA ENGINEERING • PROJECT-054</a:t>
+            </a:r>
+          </a:p>
+          <a:p>
+            <a:r>
+              <a:rPr b="1" sz="2000">
+                <a:solidFill>
+                  <a:srgbClr val="0F172A"/>
+                </a:solidFill>
+              </a:rPr>
+              <a:t>6,000-Record Multi-Station Meteorological Corpus</a:t>
+            </a:r>
+          </a:p>
+        </p:txBody>
+      </p:sp>
+      <p:sp>
+        <p:nvSpPr>
+          <p:cNvPr id="3" name="Rectangle 2"/>
           <p:cNvSpPr/>
           <p:nvPr/>
         </p:nvSpPr>
         <p:spPr>
           <a:xfrm>
-            <a:off x="0" y="0"/>
-            <a:ext cx="12191695" cy="1097280"/>
+            <a:off x="731520" y="1371600"/>
+            <a:ext cx="3291840" cy="4846320"/>
           </a:xfrm>
           <a:prstGeom prst="rect">
             <a:avLst/>
           </a:prstGeom>
           <a:solidFill>
-            <a:srgbClr val="0F172A"/>
+            <a:srgbClr val="FFFFFF"/>
           </a:solidFill>
-          <a:ln>
-            <a:noFill/>
+          <a:ln w="12700">
+            <a:solidFill>
+              <a:srgbClr val="E2E8F0"/>
+            </a:solidFill>
           </a:ln>
         </p:spPr>
         <p:style>
@@ -4236,14 +7242,14 @@
       </p:sp>
       <p:sp>
         <p:nvSpPr>
-          <p:cNvPr id="3" name="TextBox 2"/>
+          <p:cNvPr id="4" name="TextBox 3"/>
           <p:cNvSpPr txBox="1"/>
           <p:nvPr/>
         </p:nvSpPr>
         <p:spPr>
           <a:xfrm>
-            <a:off x="731520" y="137160"/>
-            <a:ext cx="10698480" cy="822960"/>
+            <a:off x="914400" y="1554480"/>
+            <a:ext cx="2926080" cy="4480560"/>
           </a:xfrm>
           <a:prstGeom prst="rect">
             <a:avLst/>
@@ -4251,46 +7257,142 @@
           <a:noFill/>
         </p:spPr>
         <p:txBody>
-          <a:bodyPr wrap="square">
+          <a:bodyPr wrap="square" lIns="0" tIns="0" rIns="0" bIns="0">
             <a:spAutoFit/>
           </a:bodyPr>
           <a:lstStyle/>
           <a:p>
             <a:pPr>
-              <a:defRPr sz="2400" b="1">
-                <a:solidFill>
-                  <a:srgbClr val="FFFFFF"/>
-                </a:solidFill>
-              </a:defRPr>
-            </a:pPr>
-            <a:r>
-              <a:t>5. Experimental Results &amp; Performance Benchmarks</a:t>
-            </a:r>
-          </a:p>
-          <a:p>
-            <a:pPr>
-              <a:defRPr sz="1100">
-                <a:solidFill>
-                  <a:srgbClr val="94A3B8"/>
-                </a:solidFill>
-              </a:defRPr>
-            </a:pPr>
-            <a:r>
-              <a:t>Academic &amp; Industrial AI Project Series  |  Project 54 of 55</a:t>
-            </a:r>
-          </a:p>
-        </p:txBody>
-      </p:sp>
-      <p:sp>
-        <p:nvSpPr>
-          <p:cNvPr id="4" name="TextBox 3"/>
+              <a:spcAft>
+                <a:spcPts val="800"/>
+              </a:spcAft>
+            </a:pPr>
+            <a:r>
+              <a:rPr b="1" sz="1300">
+                <a:solidFill>
+                  <a:srgbClr val="1E293B"/>
+                </a:solidFill>
+              </a:rPr>
+              <a:t>Geographic Diversity</a:t>
+            </a:r>
+          </a:p>
+          <a:p>
+            <a:pPr>
+              <a:spcAft>
+                <a:spcPts val="500"/>
+              </a:spcAft>
+            </a:pPr>
+            <a:r>
+              <a:rPr sz="1050">
+                <a:solidFill>
+                  <a:srgbClr val="64748B"/>
+                </a:solidFill>
+              </a:rPr>
+              <a:t>• Coastal Maritime Station 01: Marine layer advection, high humidity, maritime gales.</a:t>
+            </a:r>
+          </a:p>
+          <a:p>
+            <a:pPr>
+              <a:spcAft>
+                <a:spcPts val="500"/>
+              </a:spcAft>
+            </a:pPr>
+            <a:r>
+              <a:rPr sz="1050">
+                <a:solidFill>
+                  <a:srgbClr val="64748B"/>
+                </a:solidFill>
+              </a:rPr>
+              <a:t>• Plains Supercell Station 02: Severe continental supercells, high CAPE (&gt;3,000 J/kg), tornadic risk.</a:t>
+            </a:r>
+          </a:p>
+          <a:p>
+            <a:pPr>
+              <a:spcAft>
+                <a:spcPts val="500"/>
+              </a:spcAft>
+            </a:pPr>
+            <a:r>
+              <a:rPr sz="1050">
+                <a:solidFill>
+                  <a:srgbClr val="64748B"/>
+                </a:solidFill>
+              </a:rPr>
+              <a:t>• Mountain Alpine Pass Station 03: Orographic lift, rapid adiabatic cooling, extreme wind gusts.</a:t>
+            </a:r>
+          </a:p>
+          <a:p>
+            <a:pPr>
+              <a:spcAft>
+                <a:spcPts val="500"/>
+              </a:spcAft>
+            </a:pPr>
+            <a:r>
+              <a:rPr sz="1050">
+                <a:solidFill>
+                  <a:srgbClr val="64748B"/>
+                </a:solidFill>
+              </a:rPr>
+              <a:t>• Urban Heat Island Basin 04: Anthropogenic thermal dome, elevated microclimate convection.</a:t>
+            </a:r>
+          </a:p>
+        </p:txBody>
+      </p:sp>
+      <p:sp>
+        <p:nvSpPr>
+          <p:cNvPr id="5" name="Rectangle 4"/>
+          <p:cNvSpPr/>
+          <p:nvPr/>
+        </p:nvSpPr>
+        <p:spPr>
+          <a:xfrm>
+            <a:off x="4389120" y="1371600"/>
+            <a:ext cx="3291840" cy="4846320"/>
+          </a:xfrm>
+          <a:prstGeom prst="rect">
+            <a:avLst/>
+          </a:prstGeom>
+          <a:solidFill>
+            <a:srgbClr val="FFFFFF"/>
+          </a:solidFill>
+          <a:ln w="12700">
+            <a:solidFill>
+              <a:srgbClr val="E2E8F0"/>
+            </a:solidFill>
+          </a:ln>
+        </p:spPr>
+        <p:style>
+          <a:lnRef idx="1">
+            <a:schemeClr val="accent1"/>
+          </a:lnRef>
+          <a:fillRef idx="3">
+            <a:schemeClr val="accent1"/>
+          </a:fillRef>
+          <a:effectRef idx="2">
+            <a:schemeClr val="accent1"/>
+          </a:effectRef>
+          <a:fontRef idx="minor">
+            <a:schemeClr val="lt1"/>
+          </a:fontRef>
+        </p:style>
+        <p:txBody>
+          <a:bodyPr rtlCol="0" anchor="ctr"/>
+          <a:lstStyle/>
+          <a:p>
+            <a:pPr algn="ctr"/>
+          </a:p>
+        </p:txBody>
+      </p:sp>
+      <p:sp>
+        <p:nvSpPr>
+          <p:cNvPr id="6" name="TextBox 5"/>
           <p:cNvSpPr txBox="1"/>
           <p:nvPr/>
         </p:nvSpPr>
         <p:spPr>
           <a:xfrm>
-            <a:off x="731520" y="1371600"/>
-            <a:ext cx="10698480" cy="5029200"/>
+            <a:off x="4572000" y="1554480"/>
+            <a:ext cx="2926080" cy="4480560"/>
           </a:xfrm>
           <a:prstGeom prst="rect">
             <a:avLst/>
@@ -4298,68 +7400,226 @@
           <a:noFill/>
         </p:spPr>
         <p:txBody>
-          <a:bodyPr wrap="square">
+          <a:bodyPr wrap="square" lIns="0" tIns="0" rIns="0" bIns="0">
             <a:spAutoFit/>
           </a:bodyPr>
           <a:lstStyle/>
           <a:p>
             <a:pPr>
-              <a:spcBef>
-                <a:spcPts val="1200"/>
-              </a:spcBef>
-              <a:defRPr sz="1500" b="1">
-                <a:solidFill>
-                  <a:srgbClr val="10B981"/>
-                </a:solidFill>
-              </a:defRPr>
-            </a:pPr>
-            <a:r>
-              <a:t>★ Validation Accuracy / Score: Achieved 94.8% on independent validation test holdout partitions.</a:t>
-            </a:r>
-          </a:p>
-          <a:p>
-            <a:pPr>
-              <a:spcBef>
-                <a:spcPts val="1200"/>
-              </a:spcBef>
-              <a:defRPr sz="1500" b="1">
-                <a:solidFill>
-                  <a:srgbClr val="10B981"/>
-                </a:solidFill>
-              </a:defRPr>
-            </a:pPr>
-            <a:r>
-              <a:t>★ F1-Score / Macro Precision: Balanced metric of 0.932 across positive and negative classification targets.</a:t>
-            </a:r>
-          </a:p>
-          <a:p>
-            <a:pPr>
-              <a:spcBef>
-                <a:spcPts val="1200"/>
-              </a:spcBef>
-              <a:defRPr sz="1500" b="1">
-                <a:solidFill>
-                  <a:srgbClr val="10B981"/>
-                </a:solidFill>
-              </a:defRPr>
-            </a:pPr>
-            <a:r>
-              <a:t>★ Inference Latency Profile: Median latency of 18.4 ms per inference query on edge CPU hardware.</a:t>
-            </a:r>
-          </a:p>
-          <a:p>
-            <a:pPr>
-              <a:spcBef>
-                <a:spcPts val="1200"/>
-              </a:spcBef>
-              <a:defRPr sz="1500" b="1">
-                <a:solidFill>
-                  <a:srgbClr val="10B981"/>
-                </a:solidFill>
-              </a:defRPr>
-            </a:pPr>
-            <a:r>
-              <a:t>★ False Positive Rate (FPR): Maintained below 2.8%, satisfying stringent operational false alarm constraints.</a:t>
+              <a:spcAft>
+                <a:spcPts val="800"/>
+              </a:spcAft>
+            </a:pPr>
+            <a:r>
+              <a:rPr b="1" sz="1300">
+                <a:solidFill>
+                  <a:srgbClr val="1E293B"/>
+                </a:solidFill>
+              </a:rPr>
+              <a:t>Dataset Schema &amp; Quality</a:t>
+            </a:r>
+          </a:p>
+          <a:p>
+            <a:pPr>
+              <a:spcAft>
+                <a:spcPts val="500"/>
+              </a:spcAft>
+            </a:pPr>
+            <a:r>
+              <a:rPr sz="1050">
+                <a:solidFill>
+                  <a:srgbClr val="64748B"/>
+                </a:solidFill>
+              </a:rPr>
+              <a:t>• 6,000 complete records with 27 physical and telemetry attributes.</a:t>
+            </a:r>
+          </a:p>
+          <a:p>
+            <a:pPr>
+              <a:spcAft>
+                <a:spcPts val="500"/>
+              </a:spcAft>
+            </a:pPr>
+            <a:r>
+              <a:rPr sz="1050">
+                <a:solidFill>
+                  <a:srgbClr val="64748B"/>
+                </a:solidFill>
+              </a:rPr>
+              <a:t>• Zero missing values (null count = 0), verified via automated unit tests.</a:t>
+            </a:r>
+          </a:p>
+          <a:p>
+            <a:pPr>
+              <a:spcAft>
+                <a:spcPts val="500"/>
+              </a:spcAft>
+            </a:pPr>
+            <a:r>
+              <a:rPr sz="1050">
+                <a:solidFill>
+                  <a:srgbClr val="64748B"/>
+                </a:solidFill>
+              </a:rPr>
+              <a:t>• Unique deterministic SHA-256 evidence hashes for every record.</a:t>
+            </a:r>
+          </a:p>
+          <a:p>
+            <a:pPr>
+              <a:spcAft>
+                <a:spcPts val="500"/>
+              </a:spcAft>
+            </a:pPr>
+            <a:r>
+              <a:rPr sz="1050">
+                <a:solidFill>
+                  <a:srgbClr val="64748B"/>
+                </a:solidFill>
+              </a:rPr>
+              <a:t>• Captures 12-hour lookback profiles and 1, 2, 3, 6-hour nowcast lead times.</a:t>
+            </a:r>
+          </a:p>
+        </p:txBody>
+      </p:sp>
+      <p:sp>
+        <p:nvSpPr>
+          <p:cNvPr id="7" name="Rectangle 6"/>
+          <p:cNvSpPr/>
+          <p:nvPr/>
+        </p:nvSpPr>
+        <p:spPr>
+          <a:xfrm>
+            <a:off x="8046720" y="1371600"/>
+            <a:ext cx="3291840" cy="4846320"/>
+          </a:xfrm>
+          <a:prstGeom prst="rect">
+            <a:avLst/>
+          </a:prstGeom>
+          <a:solidFill>
+            <a:srgbClr val="FFFFFF"/>
+          </a:solidFill>
+          <a:ln w="12700">
+            <a:solidFill>
+              <a:srgbClr val="E2E8F0"/>
+            </a:solidFill>
+          </a:ln>
+        </p:spPr>
+        <p:style>
+          <a:lnRef idx="1">
+            <a:schemeClr val="accent1"/>
+          </a:lnRef>
+          <a:fillRef idx="3">
+            <a:schemeClr val="accent1"/>
+          </a:fillRef>
+          <a:effectRef idx="2">
+            <a:schemeClr val="accent1"/>
+          </a:effectRef>
+          <a:fontRef idx="minor">
+            <a:schemeClr val="lt1"/>
+          </a:fontRef>
+        </p:style>
+        <p:txBody>
+          <a:bodyPr rtlCol="0" anchor="ctr"/>
+          <a:lstStyle/>
+          <a:p>
+            <a:pPr algn="ctr"/>
+          </a:p>
+        </p:txBody>
+      </p:sp>
+      <p:sp>
+        <p:nvSpPr>
+          <p:cNvPr id="8" name="TextBox 7"/>
+          <p:cNvSpPr txBox="1"/>
+          <p:nvPr/>
+        </p:nvSpPr>
+        <p:spPr>
+          <a:xfrm>
+            <a:off x="8229600" y="1554480"/>
+            <a:ext cx="2926080" cy="4480560"/>
+          </a:xfrm>
+          <a:prstGeom prst="rect">
+            <a:avLst/>
+          </a:prstGeom>
+          <a:noFill/>
+        </p:spPr>
+        <p:txBody>
+          <a:bodyPr wrap="square" lIns="0" tIns="0" rIns="0" bIns="0">
+            <a:spAutoFit/>
+          </a:bodyPr>
+          <a:lstStyle/>
+          <a:p>
+            <a:pPr>
+              <a:spcAft>
+                <a:spcPts val="800"/>
+              </a:spcAft>
+            </a:pPr>
+            <a:r>
+              <a:rPr b="1" sz="1300">
+                <a:solidFill>
+                  <a:srgbClr val="1E293B"/>
+                </a:solidFill>
+              </a:rPr>
+              <a:t>Distribution &amp; Realism</a:t>
+            </a:r>
+          </a:p>
+          <a:p>
+            <a:pPr>
+              <a:spcAft>
+                <a:spcPts val="500"/>
+              </a:spcAft>
+            </a:pPr>
+            <a:r>
+              <a:rPr sz="1050">
+                <a:solidFill>
+                  <a:srgbClr val="64748B"/>
+                </a:solidFill>
+              </a:rPr>
+              <a:t>• Normal Transition: 50% representing routine fair weather synoptic periods.</a:t>
+            </a:r>
+          </a:p>
+          <a:p>
+            <a:pPr>
+              <a:spcAft>
+                <a:spcPts val="500"/>
+              </a:spcAft>
+            </a:pPr>
+            <a:r>
+              <a:rPr sz="1050">
+                <a:solidFill>
+                  <a:srgbClr val="64748B"/>
+                </a:solidFill>
+              </a:rPr>
+              <a:t>• Heavy Rainfall: 20% representing monsoonal and tropical rain bands.</a:t>
+            </a:r>
+          </a:p>
+          <a:p>
+            <a:pPr>
+              <a:spcAft>
+                <a:spcPts val="500"/>
+              </a:spcAft>
+            </a:pPr>
+            <a:r>
+              <a:rPr sz="1050">
+                <a:solidFill>
+                  <a:srgbClr val="64748B"/>
+                </a:solidFill>
+              </a:rPr>
+              <a:t>• Severe Thunderstorms: 15% representing high-impact convective squalls.</a:t>
+            </a:r>
+          </a:p>
+          <a:p>
+            <a:pPr>
+              <a:spcAft>
+                <a:spcPts val="500"/>
+              </a:spcAft>
+            </a:pPr>
+            <a:r>
+              <a:rPr sz="1050">
+                <a:solidFill>
+                  <a:srgbClr val="64748B"/>
+                </a:solidFill>
+              </a:rPr>
+              <a:t>• Gale Wind &amp; Heatwave Spikes: 15% representing high-wind fronts and thermal domes.</a:t>
             </a:r>
           </a:p>
         </p:txBody>
@@ -4384,23 +7644,92 @@
       <p:grpSpPr/>
       <p:sp>
         <p:nvSpPr>
-          <p:cNvPr id="2" name="Rectangle 1"/>
+          <p:cNvPr id="2" name="TextBox 1"/>
+          <p:cNvSpPr txBox="1"/>
+          <p:nvPr/>
+        </p:nvSpPr>
+        <p:spPr>
+          <a:xfrm>
+            <a:off x="731520" y="365760"/>
+            <a:ext cx="10728655" cy="822960"/>
+          </a:xfrm>
+          <a:prstGeom prst="rect">
+            <a:avLst/>
+          </a:prstGeom>
+          <a:noFill/>
+        </p:spPr>
+        <p:txBody>
+          <a:bodyPr wrap="square" lIns="0" tIns="0" rIns="0" bIns="0">
+            <a:spAutoFit/>
+          </a:bodyPr>
+          <a:lstStyle/>
+          <a:p>
+            <a:r>
+              <a:rPr b="1" sz="1000">
+                <a:solidFill>
+                  <a:srgbClr val="0284C7"/>
+                </a:solidFill>
+              </a:rPr>
+              <a:t>OPERATIONAL UI • PROJECT-054</a:t>
+            </a:r>
+          </a:p>
+          <a:p>
+            <a:r>
+              <a:rPr b="1" sz="2000">
+                <a:solidFill>
+                  <a:srgbClr val="0F172A"/>
+                </a:solidFill>
+              </a:rPr>
+              <a:t>Command Center: Real-Time Weather Nowcasting Dashboard</a:t>
+            </a:r>
+          </a:p>
+        </p:txBody>
+      </p:sp>
+      <p:pic>
+        <p:nvPicPr>
+          <p:cNvPr id="3" name="Picture 2" descr="01_weather_nowcasting_dashboard.png"/>
+          <p:cNvPicPr>
+            <a:picLocks noChangeAspect="1"/>
+          </p:cNvPicPr>
+          <p:nvPr/>
+        </p:nvPicPr>
+        <p:blipFill>
+          <a:blip r:embed="rId2"/>
+          <a:stretch>
+            <a:fillRect/>
+          </a:stretch>
+        </p:blipFill>
+        <p:spPr>
+          <a:xfrm>
+            <a:off x="731520" y="1371600"/>
+            <a:ext cx="6858000" cy="4846320"/>
+          </a:xfrm>
+          <a:prstGeom prst="rect">
+            <a:avLst/>
+          </a:prstGeom>
+        </p:spPr>
+      </p:pic>
+      <p:sp>
+        <p:nvSpPr>
+          <p:cNvPr id="4" name="Rectangle 3"/>
           <p:cNvSpPr/>
           <p:nvPr/>
         </p:nvSpPr>
         <p:spPr>
           <a:xfrm>
-            <a:off x="0" y="0"/>
-            <a:ext cx="12191695" cy="1097280"/>
+            <a:off x="7863840" y="1371600"/>
+            <a:ext cx="3566160" cy="4846320"/>
           </a:xfrm>
           <a:prstGeom prst="rect">
             <a:avLst/>
           </a:prstGeom>
           <a:solidFill>
-            <a:srgbClr val="0F172A"/>
+            <a:srgbClr val="FFFFFF"/>
           </a:solidFill>
-          <a:ln>
-            <a:noFill/>
+          <a:ln w="12700">
+            <a:solidFill>
+              <a:srgbClr val="E2E8F0"/>
+            </a:solidFill>
           </a:ln>
         </p:spPr>
         <p:style>
@@ -4427,14 +7756,14 @@
       </p:sp>
       <p:sp>
         <p:nvSpPr>
-          <p:cNvPr id="3" name="TextBox 2"/>
+          <p:cNvPr id="5" name="TextBox 4"/>
           <p:cNvSpPr txBox="1"/>
           <p:nvPr/>
         </p:nvSpPr>
         <p:spPr>
           <a:xfrm>
-            <a:off x="731520" y="137160"/>
-            <a:ext cx="10698480" cy="822960"/>
+            <a:off x="8046720" y="1554480"/>
+            <a:ext cx="3200400" cy="4480560"/>
           </a:xfrm>
           <a:prstGeom prst="rect">
             <a:avLst/>
@@ -4442,163 +7771,98 @@
           <a:noFill/>
         </p:spPr>
         <p:txBody>
-          <a:bodyPr wrap="square">
+          <a:bodyPr wrap="square" lIns="0" tIns="0" rIns="0" bIns="0">
             <a:spAutoFit/>
           </a:bodyPr>
           <a:lstStyle/>
           <a:p>
             <a:pPr>
-              <a:defRPr sz="2400" b="1">
-                <a:solidFill>
-                  <a:srgbClr val="FFFFFF"/>
-                </a:solidFill>
-              </a:defRPr>
-            </a:pPr>
-            <a:r>
-              <a:t>6. Technology Stack &amp; Production Deployment</a:t>
-            </a:r>
-          </a:p>
-          <a:p>
-            <a:pPr>
-              <a:defRPr sz="1100">
-                <a:solidFill>
-                  <a:srgbClr val="94A3B8"/>
-                </a:solidFill>
-              </a:defRPr>
-            </a:pPr>
-            <a:r>
-              <a:t>Academic &amp; Industrial AI Project Series  |  Project 54 of 55</a:t>
-            </a:r>
-          </a:p>
-        </p:txBody>
-      </p:sp>
-      <p:sp>
-        <p:nvSpPr>
-          <p:cNvPr id="4" name="TextBox 3"/>
-          <p:cNvSpPr txBox="1"/>
-          <p:nvPr/>
-        </p:nvSpPr>
-        <p:spPr>
-          <a:xfrm>
-            <a:off x="731520" y="1371600"/>
-            <a:ext cx="10698480" cy="5029200"/>
-          </a:xfrm>
-          <a:prstGeom prst="rect">
-            <a:avLst/>
-          </a:prstGeom>
-          <a:noFill/>
-        </p:spPr>
-        <p:txBody>
-          <a:bodyPr wrap="square">
-            <a:spAutoFit/>
-          </a:bodyPr>
-          <a:lstStyle/>
-          <a:p>
-            <a:pPr>
-              <a:spcBef>
+              <a:spcAft>
                 <a:spcPts val="800"/>
-              </a:spcBef>
-              <a:defRPr sz="1500" b="1">
-                <a:solidFill>
-                  <a:srgbClr val="1E3A8A"/>
-                </a:solidFill>
-              </a:defRPr>
-            </a:pPr>
-            <a:r>
-              <a:t>⚙ Core Machine Learning Framework</a:t>
-            </a:r>
-          </a:p>
-          <a:p>
-            <a:pPr>
-              <a:defRPr sz="1300">
-                <a:solidFill>
-                  <a:srgbClr val="475569"/>
-                </a:solidFill>
-              </a:defRPr>
-            </a:pPr>
-            <a:r>
-              <a:t>PyTorch 2.0+ / Scikit-learn / HuggingFace Transformers / OpenCV</a:t>
-            </a:r>
-          </a:p>
-          <a:p>
-            <a:pPr>
-              <a:spcBef>
-                <a:spcPts val="800"/>
-              </a:spcBef>
-              <a:defRPr sz="1500" b="1">
-                <a:solidFill>
-                  <a:srgbClr val="1E3A8A"/>
-                </a:solidFill>
-              </a:defRPr>
-            </a:pPr>
-            <a:r>
-              <a:t>⚙ Asynchronous REST Backend</a:t>
-            </a:r>
-          </a:p>
-          <a:p>
-            <a:pPr>
-              <a:defRPr sz="1300">
-                <a:solidFill>
-                  <a:srgbClr val="475569"/>
-                </a:solidFill>
-              </a:defRPr>
-            </a:pPr>
-            <a:r>
-              <a:t>FastAPI / Uvicorn ASGI Server / Pydantic V2 Type Safety</a:t>
-            </a:r>
-          </a:p>
-          <a:p>
-            <a:pPr>
-              <a:spcBef>
-                <a:spcPts val="800"/>
-              </a:spcBef>
-              <a:defRPr sz="1500" b="1">
-                <a:solidFill>
-                  <a:srgbClr val="1E3A8A"/>
-                </a:solidFill>
-              </a:defRPr>
-            </a:pPr>
-            <a:r>
-              <a:t>⚙ Data Persistence &amp; Storage</a:t>
-            </a:r>
-          </a:p>
-          <a:p>
-            <a:pPr>
-              <a:defRPr sz="1300">
-                <a:solidFill>
-                  <a:srgbClr val="475569"/>
-                </a:solidFill>
-              </a:defRPr>
-            </a:pPr>
-            <a:r>
-              <a:t>SQLite / PostgreSQL with transactional integrity &amp; audit trail</a:t>
-            </a:r>
-          </a:p>
-          <a:p>
-            <a:pPr>
-              <a:spcBef>
-                <a:spcPts val="800"/>
-              </a:spcBef>
-              <a:defRPr sz="1500" b="1">
-                <a:solidFill>
-                  <a:srgbClr val="1E3A8A"/>
-                </a:solidFill>
-              </a:defRPr>
-            </a:pPr>
-            <a:r>
-              <a:t>⚙ Interactive Frontend Layer</a:t>
-            </a:r>
-          </a:p>
-          <a:p>
-            <a:pPr>
-              <a:defRPr sz="1300">
-                <a:solidFill>
-                  <a:srgbClr val="475569"/>
-                </a:solidFill>
-              </a:defRPr>
-            </a:pPr>
-            <a:r>
-              <a:t>Modern Responsive Web Portal (HTML5, Tailwind/CSS, JavaScript ES6+)</a:t>
+              </a:spcAft>
+            </a:pPr>
+            <a:r>
+              <a:rPr b="1" sz="1300">
+                <a:solidFill>
+                  <a:srgbClr val="1E293B"/>
+                </a:solidFill>
+              </a:rPr>
+              <a:t>Command Center Capabilities</a:t>
+            </a:r>
+          </a:p>
+          <a:p>
+            <a:pPr>
+              <a:spcAft>
+                <a:spcPts val="500"/>
+              </a:spcAft>
+            </a:pPr>
+            <a:r>
+              <a:rPr sz="1050">
+                <a:solidFill>
+                  <a:srgbClr val="64748B"/>
+                </a:solidFill>
+              </a:rPr>
+              <a:t>• Executive KPI header displaying Total Nowcast Runs (6,000+), Severe Warnings, and Mean Confidence (95.8%).</a:t>
+            </a:r>
+          </a:p>
+          <a:p>
+            <a:pPr>
+              <a:spcAft>
+                <a:spcPts val="500"/>
+              </a:spcAft>
+            </a:pPr>
+            <a:r>
+              <a:rPr sz="1050">
+                <a:solidFill>
+                  <a:srgbClr val="64748B"/>
+                </a:solidFill>
+              </a:rPr>
+              <a:t>• Dedicated Port 5054 indicator and Meteo-AI SOTA architecture badge.</a:t>
+            </a:r>
+          </a:p>
+          <a:p>
+            <a:pPr>
+              <a:spcAft>
+                <a:spcPts val="500"/>
+              </a:spcAft>
+            </a:pPr>
+            <a:r>
+              <a:rPr sz="1050">
+                <a:solidFill>
+                  <a:srgbClr val="64748B"/>
+                </a:solidFill>
+              </a:rPr>
+              <a:t>• Interactive meteorological station preset selectors and condition injection controls.</a:t>
+            </a:r>
+          </a:p>
+          <a:p>
+            <a:pPr>
+              <a:spcAft>
+                <a:spcPts val="500"/>
+              </a:spcAft>
+            </a:pPr>
+            <a:r>
+              <a:rPr sz="1050">
+                <a:solidFill>
+                  <a:srgbClr val="64748B"/>
+                </a:solidFill>
+              </a:rPr>
+              <a:t>• Real-time dual model inference with instant risk scoring and convective warning alerts.</a:t>
+            </a:r>
+          </a:p>
+          <a:p>
+            <a:pPr>
+              <a:spcAft>
+                <a:spcPts val="500"/>
+              </a:spcAft>
+            </a:pPr>
+            <a:r>
+              <a:rPr sz="1050">
+                <a:solidFill>
+                  <a:srgbClr val="64748B"/>
+                </a:solidFill>
+              </a:rPr>
+              <a:t>• Dynamic BiGRU temporal attention visualizer and rotating Doppler radar HUD.</a:t>
             </a:r>
           </a:p>
         </p:txBody>
@@ -4623,23 +7887,92 @@
       <p:grpSpPr/>
       <p:sp>
         <p:nvSpPr>
-          <p:cNvPr id="2" name="Rectangle 1"/>
+          <p:cNvPr id="2" name="TextBox 1"/>
+          <p:cNvSpPr txBox="1"/>
+          <p:nvPr/>
+        </p:nvSpPr>
+        <p:spPr>
+          <a:xfrm>
+            <a:off x="731520" y="365760"/>
+            <a:ext cx="10728655" cy="822960"/>
+          </a:xfrm>
+          <a:prstGeom prst="rect">
+            <a:avLst/>
+          </a:prstGeom>
+          <a:noFill/>
+        </p:spPr>
+        <p:txBody>
+          <a:bodyPr wrap="square" lIns="0" tIns="0" rIns="0" bIns="0">
+            <a:spAutoFit/>
+          </a:bodyPr>
+          <a:lstStyle/>
+          <a:p>
+            <a:r>
+              <a:rPr b="1" sz="1000">
+                <a:solidFill>
+                  <a:srgbClr val="0284C7"/>
+                </a:solidFill>
+              </a:rPr>
+              <a:t>STATION CASE STUDY • PROJECT-054</a:t>
+            </a:r>
+          </a:p>
+          <a:p>
+            <a:r>
+              <a:rPr b="1" sz="2000">
+                <a:solidFill>
+                  <a:srgbClr val="0F172A"/>
+                </a:solidFill>
+              </a:rPr>
+              <a:t>Coastal Maritime Station: Fair Weather Nowcast</a:t>
+            </a:r>
+          </a:p>
+        </p:txBody>
+      </p:sp>
+      <p:pic>
+        <p:nvPicPr>
+          <p:cNvPr id="3" name="Picture 2" descr="03_coastal_radar_station_nominal.png"/>
+          <p:cNvPicPr>
+            <a:picLocks noChangeAspect="1"/>
+          </p:cNvPicPr>
+          <p:nvPr/>
+        </p:nvPicPr>
+        <p:blipFill>
+          <a:blip r:embed="rId2"/>
+          <a:stretch>
+            <a:fillRect/>
+          </a:stretch>
+        </p:blipFill>
+        <p:spPr>
+          <a:xfrm>
+            <a:off x="731520" y="1371600"/>
+            <a:ext cx="6858000" cy="4846320"/>
+          </a:xfrm>
+          <a:prstGeom prst="rect">
+            <a:avLst/>
+          </a:prstGeom>
+        </p:spPr>
+      </p:pic>
+      <p:sp>
+        <p:nvSpPr>
+          <p:cNvPr id="4" name="Rectangle 3"/>
           <p:cNvSpPr/>
           <p:nvPr/>
         </p:nvSpPr>
         <p:spPr>
           <a:xfrm>
-            <a:off x="0" y="0"/>
-            <a:ext cx="12191695" cy="1097280"/>
+            <a:off x="7863840" y="1371600"/>
+            <a:ext cx="3566160" cy="4846320"/>
           </a:xfrm>
           <a:prstGeom prst="rect">
             <a:avLst/>
           </a:prstGeom>
           <a:solidFill>
-            <a:srgbClr val="0F172A"/>
+            <a:srgbClr val="FFFFFF"/>
           </a:solidFill>
-          <a:ln>
-            <a:noFill/>
+          <a:ln w="12700">
+            <a:solidFill>
+              <a:srgbClr val="E2E8F0"/>
+            </a:solidFill>
           </a:ln>
         </p:spPr>
         <p:style>
@@ -4666,14 +7999,14 @@
       </p:sp>
       <p:sp>
         <p:nvSpPr>
-          <p:cNvPr id="3" name="TextBox 2"/>
+          <p:cNvPr id="5" name="TextBox 4"/>
           <p:cNvSpPr txBox="1"/>
           <p:nvPr/>
         </p:nvSpPr>
         <p:spPr>
           <a:xfrm>
-            <a:off x="731520" y="137160"/>
-            <a:ext cx="10698480" cy="822960"/>
+            <a:off x="8046720" y="1554480"/>
+            <a:ext cx="3200400" cy="4480560"/>
           </a:xfrm>
           <a:prstGeom prst="rect">
             <a:avLst/>
@@ -4681,46 +8014,145 @@
           <a:noFill/>
         </p:spPr>
         <p:txBody>
-          <a:bodyPr wrap="square">
+          <a:bodyPr wrap="square" lIns="0" tIns="0" rIns="0" bIns="0">
             <a:spAutoFit/>
           </a:bodyPr>
           <a:lstStyle/>
           <a:p>
             <a:pPr>
-              <a:defRPr sz="2400" b="1">
-                <a:solidFill>
-                  <a:srgbClr val="FFFFFF"/>
-                </a:solidFill>
-              </a:defRPr>
-            </a:pPr>
-            <a:r>
-              <a:t>7. Conclusion &amp; Future Roadmap</a:t>
-            </a:r>
-          </a:p>
-          <a:p>
-            <a:pPr>
-              <a:defRPr sz="1100">
-                <a:solidFill>
-                  <a:srgbClr val="94A3B8"/>
-                </a:solidFill>
-              </a:defRPr>
-            </a:pPr>
-            <a:r>
-              <a:t>Academic &amp; Industrial AI Project Series  |  Project 54 of 55</a:t>
-            </a:r>
-          </a:p>
-        </p:txBody>
-      </p:sp>
-      <p:sp>
-        <p:nvSpPr>
-          <p:cNvPr id="4" name="TextBox 3"/>
+              <a:spcAft>
+                <a:spcPts val="800"/>
+              </a:spcAft>
+            </a:pPr>
+            <a:r>
+              <a:rPr b="1" sz="1300">
+                <a:solidFill>
+                  <a:srgbClr val="1E293B"/>
+                </a:solidFill>
+              </a:rPr>
+              <a:t>Fair Weather Verification</a:t>
+            </a:r>
+          </a:p>
+          <a:p>
+            <a:pPr>
+              <a:spcAft>
+                <a:spcPts val="500"/>
+              </a:spcAft>
+            </a:pPr>
+            <a:r>
+              <a:rPr sz="1050">
+                <a:solidFill>
+                  <a:srgbClr val="64748B"/>
+                </a:solidFill>
+              </a:rPr>
+              <a:t>• Station: Coastal Maritime Radar Station 01 (Elevation: 12m).</a:t>
+            </a:r>
+          </a:p>
+          <a:p>
+            <a:pPr>
+              <a:spcAft>
+                <a:spcPts val="500"/>
+              </a:spcAft>
+            </a:pPr>
+            <a:r>
+              <a:rPr sz="1050">
+                <a:solidFill>
+                  <a:srgbClr val="64748B"/>
+                </a:solidFill>
+              </a:rPr>
+              <a:t>• Condition: Normal Transition (Stable marine boundary layer).</a:t>
+            </a:r>
+          </a:p>
+          <a:p>
+            <a:pPr>
+              <a:spcAft>
+                <a:spcPts val="500"/>
+              </a:spcAft>
+            </a:pPr>
+            <a:r>
+              <a:rPr sz="1050">
+                <a:solidFill>
+                  <a:srgbClr val="64748B"/>
+                </a:solidFill>
+              </a:rPr>
+              <a:t>• Barometric Pressure: 1012.0 hPa (High synoptic stability).</a:t>
+            </a:r>
+          </a:p>
+          <a:p>
+            <a:pPr>
+              <a:spcAft>
+                <a:spcPts val="500"/>
+              </a:spcAft>
+            </a:pPr>
+            <a:r>
+              <a:rPr sz="1050">
+                <a:solidFill>
+                  <a:srgbClr val="64748B"/>
+                </a:solidFill>
+              </a:rPr>
+              <a:t>• Radar Reflectivity: 28.0 dBZ (Light marine mist, non-convective).</a:t>
+            </a:r>
+          </a:p>
+          <a:p>
+            <a:pPr>
+              <a:spcAft>
+                <a:spcPts val="500"/>
+              </a:spcAft>
+            </a:pPr>
+            <a:r>
+              <a:rPr sz="1050">
+                <a:solidFill>
+                  <a:srgbClr val="64748B"/>
+                </a:solidFill>
+              </a:rPr>
+              <a:t>• Severe Weather Risk: 0.08 (Well below 0.30 warning threshold).</a:t>
+            </a:r>
+          </a:p>
+          <a:p>
+            <a:pPr>
+              <a:spcAft>
+                <a:spcPts val="500"/>
+              </a:spcAft>
+            </a:pPr>
+            <a:r>
+              <a:rPr sz="1050">
+                <a:solidFill>
+                  <a:srgbClr val="64748B"/>
+                </a:solidFill>
+              </a:rPr>
+              <a:t>• Advisory: Atmospheric conditions remain stable; routine observations continue.</a:t>
+            </a:r>
+          </a:p>
+        </p:txBody>
+      </p:sp>
+    </p:spTree>
+  </p:cSld>
+  <p:clrMapOvr>
+    <a:masterClrMapping/>
+  </p:clrMapOvr>
+</p:sld>
+</file>
+
+<file path=ppt/slides/slide9.xml><?xml version="1.0" encoding="utf-8"?>
+<p:sld xmlns:a="http://schemas.openxmlformats.org/drawingml/2006/main" xmlns:p="http://schemas.openxmlformats.org/presentationml/2006/main" xmlns:r="http://schemas.openxmlformats.org/officeDocument/2006/relationships">
+  <p:cSld>
+    <p:spTree>
+      <p:nvGrpSpPr>
+        <p:cNvPr id="1" name=""/>
+        <p:cNvGrpSpPr/>
+        <p:nvPr/>
+      </p:nvGrpSpPr>
+      <p:grpSpPr/>
+      <p:sp>
+        <p:nvSpPr>
+          <p:cNvPr id="2" name="TextBox 1"/>
           <p:cNvSpPr txBox="1"/>
           <p:nvPr/>
         </p:nvSpPr>
         <p:spPr>
           <a:xfrm>
-            <a:off x="731520" y="1371600"/>
-            <a:ext cx="10698480" cy="5029200"/>
+            <a:off x="731520" y="365760"/>
+            <a:ext cx="10728655" cy="822960"/>
           </a:xfrm>
           <a:prstGeom prst="rect">
             <a:avLst/>
@@ -4728,89 +8160,225 @@
           <a:noFill/>
         </p:spPr>
         <p:txBody>
-          <a:bodyPr wrap="square">
+          <a:bodyPr wrap="square" lIns="0" tIns="0" rIns="0" bIns="0">
             <a:spAutoFit/>
           </a:bodyPr>
           <a:lstStyle/>
           <a:p>
-            <a:pPr>
-              <a:spcBef>
-                <a:spcPts val="1000"/>
-              </a:spcBef>
-              <a:defRPr sz="1500" b="1">
+            <a:r>
+              <a:rPr b="1" sz="1000">
+                <a:solidFill>
+                  <a:srgbClr val="0284C7"/>
+                </a:solidFill>
+              </a:rPr>
+              <a:t>EXTREME WEATHER • PROJECT-054</a:t>
+            </a:r>
+          </a:p>
+          <a:p>
+            <a:r>
+              <a:rPr b="1" sz="2000">
                 <a:solidFill>
                   <a:srgbClr val="0F172A"/>
                 </a:solidFill>
-              </a:defRPr>
-            </a:pPr>
-            <a:r>
-              <a:t>■ Project Accomplishments</a:t>
-            </a:r>
-          </a:p>
-          <a:p>
-            <a:pPr>
-              <a:defRPr sz="1300">
-                <a:solidFill>
-                  <a:srgbClr val="475569"/>
-                </a:solidFill>
-              </a:defRPr>
-            </a:pPr>
-            <a:r>
-              <a:t>Engineered a robust, end-to-end prototype validating the initial abstract with reproducible experiments.</a:t>
-            </a:r>
-          </a:p>
-          <a:p>
-            <a:pPr>
-              <a:spcBef>
-                <a:spcPts val="1000"/>
-              </a:spcBef>
-              <a:defRPr sz="1500" b="1">
-                <a:solidFill>
-                  <a:srgbClr val="0F172A"/>
-                </a:solidFill>
-              </a:defRPr>
-            </a:pPr>
-            <a:r>
-              <a:t>■ Industrial Significance</a:t>
-            </a:r>
-          </a:p>
-          <a:p>
-            <a:pPr>
-              <a:defRPr sz="1300">
-                <a:solidFill>
-                  <a:srgbClr val="475569"/>
-                </a:solidFill>
-              </a:defRPr>
-            </a:pPr>
-            <a:r>
-              <a:t>Eliminates latency and manual friction while ensuring high confidence automated decision support.</a:t>
-            </a:r>
-          </a:p>
-          <a:p>
-            <a:pPr>
-              <a:spcBef>
-                <a:spcPts val="1000"/>
-              </a:spcBef>
-              <a:defRPr sz="1500" b="1">
-                <a:solidFill>
-                  <a:srgbClr val="0F172A"/>
-                </a:solidFill>
-              </a:defRPr>
-            </a:pPr>
-            <a:r>
-              <a:t>■ Future Scope &amp; Extensions</a:t>
-            </a:r>
-          </a:p>
-          <a:p>
-            <a:pPr>
-              <a:defRPr sz="1300">
-                <a:solidFill>
-                  <a:srgbClr val="475569"/>
-                </a:solidFill>
-              </a:defRPr>
-            </a:pPr>
-            <a:r>
-              <a:t>Integration with federated edge sensors, distributed multi-tenant cloud clustering, and automated active learning.</a:t>
+              </a:rPr>
+              <a:t>Plains Convective Alley: Severe Supercell Storm Warning</a:t>
+            </a:r>
+          </a:p>
+        </p:txBody>
+      </p:sp>
+      <p:pic>
+        <p:nvPicPr>
+          <p:cNvPr id="3" name="Picture 2" descr="04_plains_supercell_severe_storm.png"/>
+          <p:cNvPicPr>
+            <a:picLocks noChangeAspect="1"/>
+          </p:cNvPicPr>
+          <p:nvPr/>
+        </p:nvPicPr>
+        <p:blipFill>
+          <a:blip r:embed="rId2"/>
+          <a:stretch>
+            <a:fillRect/>
+          </a:stretch>
+        </p:blipFill>
+        <p:spPr>
+          <a:xfrm>
+            <a:off x="731520" y="1371600"/>
+            <a:ext cx="6858000" cy="4846320"/>
+          </a:xfrm>
+          <a:prstGeom prst="rect">
+            <a:avLst/>
+          </a:prstGeom>
+        </p:spPr>
+      </p:pic>
+      <p:sp>
+        <p:nvSpPr>
+          <p:cNvPr id="4" name="Rectangle 3"/>
+          <p:cNvSpPr/>
+          <p:nvPr/>
+        </p:nvSpPr>
+        <p:spPr>
+          <a:xfrm>
+            <a:off x="7863840" y="1371600"/>
+            <a:ext cx="3566160" cy="4846320"/>
+          </a:xfrm>
+          <a:prstGeom prst="rect">
+            <a:avLst/>
+          </a:prstGeom>
+          <a:solidFill>
+            <a:srgbClr val="FFFFFF"/>
+          </a:solidFill>
+          <a:ln w="12700">
+            <a:solidFill>
+              <a:srgbClr val="E2E8F0"/>
+            </a:solidFill>
+          </a:ln>
+        </p:spPr>
+        <p:style>
+          <a:lnRef idx="1">
+            <a:schemeClr val="accent1"/>
+          </a:lnRef>
+          <a:fillRef idx="3">
+            <a:schemeClr val="accent1"/>
+          </a:fillRef>
+          <a:effectRef idx="2">
+            <a:schemeClr val="accent1"/>
+          </a:effectRef>
+          <a:fontRef idx="minor">
+            <a:schemeClr val="lt1"/>
+          </a:fontRef>
+        </p:style>
+        <p:txBody>
+          <a:bodyPr rtlCol="0" anchor="ctr"/>
+          <a:lstStyle/>
+          <a:p>
+            <a:pPr algn="ctr"/>
+          </a:p>
+        </p:txBody>
+      </p:sp>
+      <p:sp>
+        <p:nvSpPr>
+          <p:cNvPr id="5" name="TextBox 4"/>
+          <p:cNvSpPr txBox="1"/>
+          <p:nvPr/>
+        </p:nvSpPr>
+        <p:spPr>
+          <a:xfrm>
+            <a:off x="8046720" y="1554480"/>
+            <a:ext cx="3200400" cy="4480560"/>
+          </a:xfrm>
+          <a:prstGeom prst="rect">
+            <a:avLst/>
+          </a:prstGeom>
+          <a:noFill/>
+        </p:spPr>
+        <p:txBody>
+          <a:bodyPr wrap="square" lIns="0" tIns="0" rIns="0" bIns="0">
+            <a:spAutoFit/>
+          </a:bodyPr>
+          <a:lstStyle/>
+          <a:p>
+            <a:pPr>
+              <a:spcAft>
+                <a:spcPts val="800"/>
+              </a:spcAft>
+            </a:pPr>
+            <a:r>
+              <a:rPr b="1" sz="1300">
+                <a:solidFill>
+                  <a:srgbClr val="1E293B"/>
+                </a:solidFill>
+              </a:rPr>
+              <a:t>Severe Supercell Warning</a:t>
+            </a:r>
+          </a:p>
+          <a:p>
+            <a:pPr>
+              <a:spcAft>
+                <a:spcPts val="500"/>
+              </a:spcAft>
+            </a:pPr>
+            <a:r>
+              <a:rPr sz="1050">
+                <a:solidFill>
+                  <a:srgbClr val="64748B"/>
+                </a:solidFill>
+              </a:rPr>
+              <a:t>• Station: Plains Supercell Radar Station 02 (Elevation: 340m).</a:t>
+            </a:r>
+          </a:p>
+          <a:p>
+            <a:pPr>
+              <a:spcAft>
+                <a:spcPts val="500"/>
+              </a:spcAft>
+            </a:pPr>
+            <a:r>
+              <a:rPr sz="1050">
+                <a:solidFill>
+                  <a:srgbClr val="64748B"/>
+                </a:solidFill>
+              </a:rPr>
+              <a:t>• Event: Severe Thunderstorm with Extreme Convective Inflow.</a:t>
+            </a:r>
+          </a:p>
+          <a:p>
+            <a:pPr>
+              <a:spcAft>
+                <a:spcPts val="500"/>
+              </a:spcAft>
+            </a:pPr>
+            <a:r>
+              <a:rPr sz="1050">
+                <a:solidFill>
+                  <a:srgbClr val="64748B"/>
+                </a:solidFill>
+              </a:rPr>
+              <a:t>• Thermodynamics: CAPE 3,600 J/kg, Lifted Index -6.8°C, PWAT 55mm.</a:t>
+            </a:r>
+          </a:p>
+          <a:p>
+            <a:pPr>
+              <a:spcAft>
+                <a:spcPts val="500"/>
+              </a:spcAft>
+            </a:pPr>
+            <a:r>
+              <a:rPr sz="1050">
+                <a:solidFill>
+                  <a:srgbClr val="64748B"/>
+                </a:solidFill>
+              </a:rPr>
+              <a:t>• Radar Core: 58.5 dBZ (Severe hail core and torrential downpour).</a:t>
+            </a:r>
+          </a:p>
+          <a:p>
+            <a:pPr>
+              <a:spcAft>
+                <a:spcPts val="500"/>
+              </a:spcAft>
+            </a:pPr>
+            <a:r>
+              <a:rPr sz="1050">
+                <a:solidFill>
+                  <a:srgbClr val="64748B"/>
+                </a:solidFill>
+              </a:rPr>
+              <a:t>• Severe Risk: 0.92 | Precip Rate: 82.0 mm/h | Gusts: 115.0 km/h.</a:t>
+            </a:r>
+          </a:p>
+          <a:p>
+            <a:pPr>
+              <a:spcAft>
+                <a:spcPts val="500"/>
+              </a:spcAft>
+            </a:pPr>
+            <a:r>
+              <a:rPr sz="1050">
+                <a:solidFill>
+                  <a:srgbClr val="64748B"/>
+                </a:solidFill>
+              </a:rPr>
+              <a:t>• Action Directive: Issue Level-3 Convective Storm Warning: high lightning and flash flood risk.</a:t>
             </a:r>
           </a:p>
         </p:txBody>
